--- a/Brochure_Template.pptx
+++ b/Brochure_Template.pptx
@@ -43,7 +43,7 @@
         <p:spPr>
           <a:xfrm>
             <a:off x="502920" y="820800"/>
-            <a:ext cx="9051840" cy="274680"/>
+            <a:ext cx="9051480" cy="274680"/>
           </a:xfrm>
           <a:prstGeom prst="rect">
             <a:avLst/>
@@ -59,7 +59,13 @@
           </a:bodyPr>
           <a:p>
             <a:pPr indent="0">
+              <a:lnSpc>
+                <a:spcPct val="100000"/>
+              </a:lnSpc>
               <a:buNone/>
+              <a:tabLst>
+                <a:tab algn="l" pos="0"/>
+              </a:tabLst>
             </a:pPr>
             <a:r>
               <a:rPr lang="en-CA" sz="1800" b="0" u="none" strike="noStrike">
@@ -96,7 +102,7 @@
         <p:spPr>
           <a:xfrm>
             <a:off x="502920" y="1818000"/>
-            <a:ext cx="9051840" cy="4507200"/>
+            <a:ext cx="9051480" cy="4506840"/>
           </a:xfrm>
           <a:prstGeom prst="rect">
             <a:avLst/>
@@ -112,6 +118,9 @@
           </a:bodyPr>
           <a:p>
             <a:pPr marL="432000" indent="-324000">
+              <a:lnSpc>
+                <a:spcPct val="100000"/>
+              </a:lnSpc>
               <a:spcBef>
                 <a:spcPts val="1417"/>
               </a:spcBef>
@@ -144,6 +153,9 @@
           </a:p>
           <a:p>
             <a:pPr marL="864000" lvl="1" indent="-324000">
+              <a:lnSpc>
+                <a:spcPct val="100000"/>
+              </a:lnSpc>
               <a:spcBef>
                 <a:spcPts val="1134"/>
               </a:spcBef>
@@ -176,6 +188,9 @@
           </a:p>
           <a:p>
             <a:pPr marL="1296000" lvl="2" indent="-288000">
+              <a:lnSpc>
+                <a:spcPct val="100000"/>
+              </a:lnSpc>
               <a:spcBef>
                 <a:spcPts val="850"/>
               </a:spcBef>
@@ -208,6 +223,9 @@
           </a:p>
           <a:p>
             <a:pPr marL="1728000" lvl="3" indent="-216000">
+              <a:lnSpc>
+                <a:spcPct val="100000"/>
+              </a:lnSpc>
               <a:spcBef>
                 <a:spcPts val="567"/>
               </a:spcBef>
@@ -240,6 +258,9 @@
           </a:p>
           <a:p>
             <a:pPr marL="2160000" lvl="4" indent="-216000">
+              <a:lnSpc>
+                <a:spcPct val="100000"/>
+              </a:lnSpc>
               <a:spcBef>
                 <a:spcPts val="283"/>
               </a:spcBef>
@@ -272,6 +293,9 @@
           </a:p>
           <a:p>
             <a:pPr marL="2592000" lvl="5" indent="-216000">
+              <a:lnSpc>
+                <a:spcPct val="100000"/>
+              </a:lnSpc>
               <a:spcBef>
                 <a:spcPts val="283"/>
               </a:spcBef>
@@ -304,6 +328,9 @@
           </a:p>
           <a:p>
             <a:pPr marL="3024000" lvl="6" indent="-216000">
+              <a:lnSpc>
+                <a:spcPct val="100000"/>
+              </a:lnSpc>
               <a:spcBef>
                 <a:spcPts val="283"/>
               </a:spcBef>
@@ -349,7 +376,7 @@
         <p:spPr>
           <a:xfrm>
             <a:off x="3439440" y="7080120"/>
-            <a:ext cx="3187800" cy="535320"/>
+            <a:ext cx="3187440" cy="534960"/>
           </a:xfrm>
           <a:prstGeom prst="rect">
             <a:avLst/>
@@ -427,7 +454,7 @@
         <p:spPr>
           <a:xfrm>
             <a:off x="7211160" y="7080120"/>
-            <a:ext cx="2342880" cy="535320"/>
+            <a:ext cx="2342520" cy="534960"/>
           </a:xfrm>
           <a:prstGeom prst="rect">
             <a:avLst/>
@@ -470,7 +497,7 @@
                 <a:tab algn="l" pos="0"/>
               </a:tabLst>
             </a:pPr>
-            <a:fld id="{81952E31-A23B-4DEC-8964-D0E38E3DDF2D}" type="slidenum">
+            <a:fld id="{190B3A3F-89E4-4D28-AAD4-4D349F5C9963}" type="slidenum">
               <a:rPr lang="en-CA" sz="1400" b="0" u="none" strike="noStrike">
                 <a:solidFill>
                   <a:srgbClr val="000000"/>
@@ -505,7 +532,7 @@
         <p:spPr>
           <a:xfrm>
             <a:off x="502920" y="7080120"/>
-            <a:ext cx="2342880" cy="535320"/>
+            <a:ext cx="2342520" cy="534960"/>
           </a:xfrm>
           <a:prstGeom prst="rect">
             <a:avLst/>
@@ -521,7 +548,13 @@
           </a:bodyPr>
           <a:lstStyle>
             <a:lvl1pPr indent="0">
+              <a:lnSpc>
+                <a:spcPct val="100000"/>
+              </a:lnSpc>
               <a:buNone/>
+              <a:tabLst>
+                <a:tab algn="l" pos="0"/>
+              </a:tabLst>
               <a:defRPr lang="en-CA" sz="1400" b="0" u="none" strike="noStrike">
                 <a:solidFill>
                   <a:srgbClr val="000000"/>
@@ -534,7 +567,13 @@
           </a:lstStyle>
           <a:p>
             <a:pPr indent="0">
+              <a:lnSpc>
+                <a:spcPct val="100000"/>
+              </a:lnSpc>
               <a:buNone/>
+              <a:tabLst>
+                <a:tab algn="l" pos="0"/>
+              </a:tabLst>
             </a:pPr>
             <a:r>
               <a:rPr lang="en-CA" sz="1400" b="0" u="none" strike="noStrike">
@@ -593,7 +632,7 @@
         <p:spPr>
           <a:xfrm>
             <a:off x="502920" y="820800"/>
-            <a:ext cx="9051840" cy="274680"/>
+            <a:ext cx="9051480" cy="274680"/>
           </a:xfrm>
           <a:prstGeom prst="rect">
             <a:avLst/>
@@ -609,7 +648,13 @@
           </a:bodyPr>
           <a:p>
             <a:pPr indent="0">
+              <a:lnSpc>
+                <a:spcPct val="100000"/>
+              </a:lnSpc>
               <a:buNone/>
+              <a:tabLst>
+                <a:tab algn="l" pos="0"/>
+              </a:tabLst>
             </a:pPr>
             <a:r>
               <a:rPr lang="en-CA" sz="1800" b="0" u="none" strike="noStrike">
@@ -646,7 +691,7 @@
         <p:spPr>
           <a:xfrm>
             <a:off x="3439440" y="7080120"/>
-            <a:ext cx="3187800" cy="535320"/>
+            <a:ext cx="3187440" cy="534960"/>
           </a:xfrm>
           <a:prstGeom prst="rect">
             <a:avLst/>
@@ -724,7 +769,7 @@
         <p:spPr>
           <a:xfrm>
             <a:off x="7211160" y="7080120"/>
-            <a:ext cx="2342880" cy="535320"/>
+            <a:ext cx="2342520" cy="534960"/>
           </a:xfrm>
           <a:prstGeom prst="rect">
             <a:avLst/>
@@ -767,7 +812,7 @@
                 <a:tab algn="l" pos="0"/>
               </a:tabLst>
             </a:pPr>
-            <a:fld id="{7DF18875-C1AF-4AC0-BC80-21A96445EAB5}" type="slidenum">
+            <a:fld id="{3FBE0CCD-27BA-4FD2-A4CA-60195DFF7F81}" type="slidenum">
               <a:rPr lang="en-CA" sz="1400" b="0" u="none" strike="noStrike">
                 <a:solidFill>
                   <a:srgbClr val="000000"/>
@@ -802,7 +847,7 @@
         <p:spPr>
           <a:xfrm>
             <a:off x="502920" y="7080120"/>
-            <a:ext cx="2342880" cy="535320"/>
+            <a:ext cx="2342520" cy="534960"/>
           </a:xfrm>
           <a:prstGeom prst="rect">
             <a:avLst/>
@@ -818,7 +863,13 @@
           </a:bodyPr>
           <a:lstStyle>
             <a:lvl1pPr indent="0">
+              <a:lnSpc>
+                <a:spcPct val="100000"/>
+              </a:lnSpc>
               <a:buNone/>
+              <a:tabLst>
+                <a:tab algn="l" pos="0"/>
+              </a:tabLst>
               <a:defRPr lang="en-CA" sz="1400" b="0" u="none" strike="noStrike">
                 <a:solidFill>
                   <a:srgbClr val="000000"/>
@@ -831,7 +882,13 @@
           </a:lstStyle>
           <a:p>
             <a:pPr indent="0">
+              <a:lnSpc>
+                <a:spcPct val="100000"/>
+              </a:lnSpc>
               <a:buNone/>
+              <a:tabLst>
+                <a:tab algn="l" pos="0"/>
+              </a:tabLst>
             </a:pPr>
             <a:r>
               <a:rPr lang="en-CA" sz="1400" b="0" u="none" strike="noStrike">
@@ -868,7 +925,7 @@
         <p:spPr>
           <a:xfrm>
             <a:off x="502920" y="1818720"/>
-            <a:ext cx="9052200" cy="4507560"/>
+            <a:ext cx="9051840" cy="4507200"/>
           </a:xfrm>
           <a:prstGeom prst="rect">
             <a:avLst/>
@@ -884,6 +941,9 @@
           </a:bodyPr>
           <a:p>
             <a:pPr marL="432000" indent="-324000">
+              <a:lnSpc>
+                <a:spcPct val="100000"/>
+              </a:lnSpc>
               <a:spcBef>
                 <a:spcPts val="1417"/>
               </a:spcBef>
@@ -916,6 +976,9 @@
           </a:p>
           <a:p>
             <a:pPr marL="864000" lvl="1" indent="-324000">
+              <a:lnSpc>
+                <a:spcPct val="100000"/>
+              </a:lnSpc>
               <a:spcBef>
                 <a:spcPts val="1134"/>
               </a:spcBef>
@@ -948,6 +1011,9 @@
           </a:p>
           <a:p>
             <a:pPr marL="1296000" lvl="2" indent="-288000">
+              <a:lnSpc>
+                <a:spcPct val="100000"/>
+              </a:lnSpc>
               <a:spcBef>
                 <a:spcPts val="850"/>
               </a:spcBef>
@@ -980,6 +1046,9 @@
           </a:p>
           <a:p>
             <a:pPr marL="1728000" lvl="3" indent="-216000">
+              <a:lnSpc>
+                <a:spcPct val="100000"/>
+              </a:lnSpc>
               <a:spcBef>
                 <a:spcPts val="567"/>
               </a:spcBef>
@@ -1012,6 +1081,9 @@
           </a:p>
           <a:p>
             <a:pPr marL="2160000" lvl="4" indent="-216000">
+              <a:lnSpc>
+                <a:spcPct val="100000"/>
+              </a:lnSpc>
               <a:spcBef>
                 <a:spcPts val="283"/>
               </a:spcBef>
@@ -1044,6 +1116,9 @@
           </a:p>
           <a:p>
             <a:pPr marL="2592000" lvl="5" indent="-216000">
+              <a:lnSpc>
+                <a:spcPct val="100000"/>
+              </a:lnSpc>
               <a:spcBef>
                 <a:spcPts val="283"/>
               </a:spcBef>
@@ -1076,6 +1151,9 @@
           </a:p>
           <a:p>
             <a:pPr marL="3024000" lvl="6" indent="-216000">
+              <a:lnSpc>
+                <a:spcPct val="100000"/>
+              </a:lnSpc>
               <a:spcBef>
                 <a:spcPts val="283"/>
               </a:spcBef>
@@ -1173,8 +1251,8 @@
         </p:nvSpPr>
         <p:spPr>
           <a:xfrm>
-            <a:off x="244800" y="282600"/>
-            <a:ext cx="996480" cy="1345680"/>
+            <a:off x="244800" y="757080"/>
+            <a:ext cx="996120" cy="396000"/>
           </a:xfrm>
           <a:prstGeom prst="rect">
             <a:avLst/>
@@ -1191,7 +1269,7 @@
           <a:fontRef idx="minor"/>
         </p:style>
         <p:txBody>
-          <a:bodyPr lIns="90000" rIns="90000" tIns="45000" bIns="45000" anchor="t" anchorCtr="1">
+          <a:bodyPr lIns="90000" rIns="90000" tIns="45000" bIns="45000" anchor="ctr" anchorCtr="1">
             <a:spAutoFit/>
           </a:bodyPr>
           <a:p>
@@ -1208,6 +1286,7 @@
                 <a:effectLst/>
                 <a:uFillTx/>
                 <a:latin typeface="Nimbus Roman"/>
+                <a:ea typeface="DejaVu Sans"/>
               </a:rPr>
               <a:t>{{caption_1}}</a:t>
             </a:r>
@@ -1245,8 +1324,8 @@
         </p:nvSpPr>
         <p:spPr>
           <a:xfrm>
-            <a:off x="2037600" y="1746360"/>
-            <a:ext cx="996480" cy="1405440"/>
+            <a:off x="2037600" y="2250720"/>
+            <a:ext cx="996120" cy="396000"/>
           </a:xfrm>
           <a:prstGeom prst="rect">
             <a:avLst/>
@@ -1263,7 +1342,7 @@
           <a:fontRef idx="minor"/>
         </p:style>
         <p:txBody>
-          <a:bodyPr lIns="90000" rIns="90000" tIns="45000" bIns="45000" anchor="t" anchorCtr="1">
+          <a:bodyPr lIns="90000" rIns="90000" tIns="45000" bIns="45000" anchor="ctr" anchorCtr="1">
             <a:spAutoFit/>
           </a:bodyPr>
           <a:p>
@@ -1280,6 +1359,7 @@
                 <a:effectLst/>
                 <a:uFillTx/>
                 <a:latin typeface="Nimbus Roman"/>
+                <a:ea typeface="DejaVu Sans"/>
               </a:rPr>
               <a:t>{{caption_2}}</a:t>
             </a:r>
@@ -1317,8 +1397,8 @@
         </p:nvSpPr>
         <p:spPr>
           <a:xfrm>
-            <a:off x="254160" y="3244320"/>
-            <a:ext cx="996480" cy="1345680"/>
+            <a:off x="254160" y="3718800"/>
+            <a:ext cx="996120" cy="396000"/>
           </a:xfrm>
           <a:prstGeom prst="rect">
             <a:avLst/>
@@ -1335,7 +1415,7 @@
           <a:fontRef idx="minor"/>
         </p:style>
         <p:txBody>
-          <a:bodyPr lIns="90000" rIns="90000" tIns="45000" bIns="45000" anchor="t" anchorCtr="1">
+          <a:bodyPr lIns="90000" rIns="90000" tIns="45000" bIns="45000" anchor="ctr" anchorCtr="1">
             <a:spAutoFit/>
           </a:bodyPr>
           <a:p>
@@ -1352,6 +1432,7 @@
                 <a:effectLst/>
                 <a:uFillTx/>
                 <a:latin typeface="Nimbus Roman"/>
+                <a:ea typeface="DejaVu Sans"/>
               </a:rPr>
               <a:t>{{caption_3}}</a:t>
             </a:r>
@@ -1389,8 +1470,8 @@
         </p:nvSpPr>
         <p:spPr>
           <a:xfrm>
-            <a:off x="1995120" y="4647600"/>
-            <a:ext cx="996480" cy="1345680"/>
+            <a:off x="1995120" y="5122080"/>
+            <a:ext cx="996120" cy="396000"/>
           </a:xfrm>
           <a:prstGeom prst="rect">
             <a:avLst/>
@@ -1407,7 +1488,7 @@
           <a:fontRef idx="minor"/>
         </p:style>
         <p:txBody>
-          <a:bodyPr lIns="90000" rIns="90000" tIns="45000" bIns="45000" anchor="t" anchorCtr="1">
+          <a:bodyPr lIns="90000" rIns="90000" tIns="45000" bIns="45000" anchor="ctr" anchorCtr="1">
             <a:spAutoFit/>
           </a:bodyPr>
           <a:p>
@@ -1424,6 +1505,7 @@
                 <a:effectLst/>
                 <a:uFillTx/>
                 <a:latin typeface="Nimbus Roman"/>
+                <a:ea typeface="DejaVu Sans"/>
               </a:rPr>
               <a:t>{{caption_4}}</a:t>
             </a:r>
@@ -1461,8 +1543,8 @@
         </p:nvSpPr>
         <p:spPr>
           <a:xfrm>
-            <a:off x="280440" y="6067800"/>
-            <a:ext cx="996480" cy="1345680"/>
+            <a:off x="280440" y="6542280"/>
+            <a:ext cx="996120" cy="396000"/>
           </a:xfrm>
           <a:prstGeom prst="rect">
             <a:avLst/>
@@ -1479,7 +1561,7 @@
           <a:fontRef idx="minor"/>
         </p:style>
         <p:txBody>
-          <a:bodyPr lIns="90000" rIns="90000" tIns="45000" bIns="45000" anchor="t" anchorCtr="1">
+          <a:bodyPr lIns="90000" rIns="90000" tIns="45000" bIns="45000" anchor="ctr" anchorCtr="1">
             <a:spAutoFit/>
           </a:bodyPr>
           <a:p>
@@ -1496,6 +1578,7 @@
                 <a:effectLst/>
                 <a:uFillTx/>
                 <a:latin typeface="Nimbus Roman"/>
+                <a:ea typeface="DejaVu Sans"/>
               </a:rPr>
               <a:t>{{caption_5}}</a:t>
             </a:r>
@@ -1534,7 +1617,7 @@
         <p:spPr>
           <a:xfrm>
             <a:off x="1255320" y="270000"/>
-            <a:ext cx="1765440" cy="1357920"/>
+            <a:ext cx="1765080" cy="1357560"/>
           </a:xfrm>
           <a:prstGeom prst="rect">
             <a:avLst/>
@@ -1583,7 +1666,7 @@
         <p:spPr>
           <a:xfrm>
             <a:off x="240480" y="1755720"/>
-            <a:ext cx="1801440" cy="1410840"/>
+            <a:ext cx="1801080" cy="1410480"/>
           </a:xfrm>
           <a:prstGeom prst="rect">
             <a:avLst/>
@@ -1632,7 +1715,7 @@
         <p:spPr>
           <a:xfrm>
             <a:off x="239760" y="4661640"/>
-            <a:ext cx="1703520" cy="1334160"/>
+            <a:ext cx="1703160" cy="1333800"/>
           </a:xfrm>
           <a:prstGeom prst="rect">
             <a:avLst/>
@@ -1681,7 +1764,7 @@
         <p:spPr>
           <a:xfrm>
             <a:off x="1319760" y="3267720"/>
-            <a:ext cx="1699920" cy="1303920"/>
+            <a:ext cx="1699560" cy="1303560"/>
           </a:xfrm>
           <a:prstGeom prst="rect">
             <a:avLst/>
@@ -1730,7 +1813,7 @@
         <p:spPr>
           <a:xfrm>
             <a:off x="1380960" y="6063840"/>
-            <a:ext cx="1640160" cy="1285560"/>
+            <a:ext cx="1639800" cy="1285200"/>
           </a:xfrm>
           <a:prstGeom prst="rect">
             <a:avLst/>
@@ -1779,7 +1862,7 @@
         <p:spPr>
           <a:xfrm>
             <a:off x="3778200" y="341280"/>
-            <a:ext cx="2587320" cy="444240"/>
+            <a:ext cx="2586960" cy="443880"/>
           </a:xfrm>
           <a:prstGeom prst="rect">
             <a:avLst/>
@@ -1837,7 +1920,7 @@
         <p:spPr>
           <a:xfrm>
             <a:off x="3651120" y="785880"/>
-            <a:ext cx="2825280" cy="5513760"/>
+            <a:ext cx="2824920" cy="5513400"/>
           </a:xfrm>
           <a:prstGeom prst="rect">
             <a:avLst/>
@@ -1877,6 +1960,7 @@
                 <a:effectLst/>
                 <a:uFillTx/>
                 <a:latin typeface="Nimbus Roman"/>
+                <a:ea typeface="DejaVu Sans"/>
               </a:rPr>
               <a:t>{{SUMMARY}}</a:t>
             </a:r>
@@ -1900,7 +1984,7 @@
         <p:spPr>
           <a:xfrm>
             <a:off x="7111800" y="1428840"/>
-            <a:ext cx="2587320" cy="444240"/>
+            <a:ext cx="2586960" cy="443880"/>
           </a:xfrm>
           <a:prstGeom prst="rect">
             <a:avLst/>
@@ -1958,7 +2042,7 @@
         <p:spPr>
           <a:xfrm>
             <a:off x="7064640" y="2086920"/>
-            <a:ext cx="2665440" cy="1936800"/>
+            <a:ext cx="2665080" cy="1936440"/>
           </a:xfrm>
           <a:prstGeom prst="rect">
             <a:avLst/>
@@ -2009,7 +2093,7 @@
         <p:spPr>
           <a:xfrm>
             <a:off x="7139160" y="4844520"/>
-            <a:ext cx="2587320" cy="444240"/>
+            <a:ext cx="2586960" cy="443880"/>
           </a:xfrm>
           <a:prstGeom prst="rect">
             <a:avLst/>
@@ -2043,6 +2127,7 @@
                 <a:effectLst/>
                 <a:uFillTx/>
                 <a:latin typeface="Nimbus Roman"/>
+                <a:ea typeface="DejaVu Sans"/>
               </a:rPr>
               <a:t>{{TITLE}}</a:t>
             </a:r>
@@ -2066,7 +2151,7 @@
         <p:spPr>
           <a:xfrm>
             <a:off x="7132320" y="6575400"/>
-            <a:ext cx="2587320" cy="444240"/>
+            <a:ext cx="2586960" cy="443880"/>
           </a:xfrm>
           <a:prstGeom prst="rect">
             <a:avLst/>
@@ -2100,6 +2185,7 @@
                 <a:effectLst/>
                 <a:uFillTx/>
                 <a:latin typeface="Nimbus Roman"/>
+                <a:ea typeface="DejaVu Sans"/>
               </a:rPr>
               <a:t>{{PRICE}}</a:t>
             </a:r>
@@ -2123,7 +2209,7 @@
         <p:spPr>
           <a:xfrm>
             <a:off x="7132320" y="6130800"/>
-            <a:ext cx="2587320" cy="444240"/>
+            <a:ext cx="2586960" cy="443880"/>
           </a:xfrm>
           <a:prstGeom prst="rect">
             <a:avLst/>
@@ -2157,6 +2243,7 @@
                 <a:effectLst/>
                 <a:uFillTx/>
                 <a:latin typeface="Nimbus Roman"/>
+                <a:ea typeface="DejaVu Sans"/>
               </a:rPr>
               <a:t>{{BEDS_AND_BATHS}}</a:t>
             </a:r>
@@ -2218,7 +2305,7 @@
         <p:spPr>
           <a:xfrm>
             <a:off x="1322640" y="241560"/>
-            <a:ext cx="1697760" cy="1311480"/>
+            <a:ext cx="1697400" cy="1311120"/>
           </a:xfrm>
           <a:prstGeom prst="rect">
             <a:avLst/>
@@ -2267,7 +2354,7 @@
         <p:spPr>
           <a:xfrm>
             <a:off x="329760" y="1672920"/>
-            <a:ext cx="1645560" cy="1323000"/>
+            <a:ext cx="1645200" cy="1322640"/>
           </a:xfrm>
           <a:prstGeom prst="rect">
             <a:avLst/>
@@ -2316,7 +2403,7 @@
         <p:spPr>
           <a:xfrm>
             <a:off x="1323360" y="3106080"/>
-            <a:ext cx="1697040" cy="1374480"/>
+            <a:ext cx="1696680" cy="1374120"/>
           </a:xfrm>
           <a:prstGeom prst="rect">
             <a:avLst/>
@@ -2365,7 +2452,7 @@
         <p:spPr>
           <a:xfrm>
             <a:off x="289800" y="4596840"/>
-            <a:ext cx="1589040" cy="1460880"/>
+            <a:ext cx="1588680" cy="1460520"/>
           </a:xfrm>
           <a:prstGeom prst="rect">
             <a:avLst/>
@@ -2414,7 +2501,7 @@
         <p:spPr>
           <a:xfrm>
             <a:off x="1332000" y="6153840"/>
-            <a:ext cx="1695960" cy="1310040"/>
+            <a:ext cx="1695600" cy="1309680"/>
           </a:xfrm>
           <a:prstGeom prst="rect">
             <a:avLst/>
@@ -2462,8 +2549,8 @@
         </p:nvSpPr>
         <p:spPr>
           <a:xfrm>
-            <a:off x="315720" y="224640"/>
-            <a:ext cx="996480" cy="1345680"/>
+            <a:off x="315720" y="699120"/>
+            <a:ext cx="996120" cy="396000"/>
           </a:xfrm>
           <a:prstGeom prst="rect">
             <a:avLst/>
@@ -2480,7 +2567,7 @@
           <a:fontRef idx="minor"/>
         </p:style>
         <p:txBody>
-          <a:bodyPr lIns="90000" rIns="90000" tIns="45000" bIns="45000" anchor="t" anchorCtr="1">
+          <a:bodyPr lIns="90000" rIns="90000" tIns="45000" bIns="45000" anchor="ctr" anchorCtr="1">
             <a:spAutoFit/>
           </a:bodyPr>
           <a:p>
@@ -2497,6 +2584,7 @@
                 <a:effectLst/>
                 <a:uFillTx/>
                 <a:latin typeface="Nimbus Roman"/>
+                <a:ea typeface="DejaVu Sans"/>
               </a:rPr>
               <a:t>{{caption_6}}</a:t>
             </a:r>
@@ -2534,8 +2622,8 @@
         </p:nvSpPr>
         <p:spPr>
           <a:xfrm>
-            <a:off x="1975680" y="1650240"/>
-            <a:ext cx="1045440" cy="1336680"/>
+            <a:off x="1975680" y="2120400"/>
+            <a:ext cx="1045080" cy="396000"/>
           </a:xfrm>
           <a:prstGeom prst="rect">
             <a:avLst/>
@@ -2552,7 +2640,7 @@
           <a:fontRef idx="minor"/>
         </p:style>
         <p:txBody>
-          <a:bodyPr lIns="90000" rIns="90000" tIns="45000" bIns="45000" anchor="t" anchorCtr="1">
+          <a:bodyPr lIns="90000" rIns="90000" tIns="45000" bIns="45000" anchor="ctr" anchorCtr="1">
             <a:spAutoFit/>
           </a:bodyPr>
           <a:p>
@@ -2569,6 +2657,7 @@
                 <a:effectLst/>
                 <a:uFillTx/>
                 <a:latin typeface="Nimbus Roman"/>
+                <a:ea typeface="DejaVu Sans"/>
               </a:rPr>
               <a:t>{{caption_7}}</a:t>
             </a:r>
@@ -2606,8 +2695,8 @@
         </p:nvSpPr>
         <p:spPr>
           <a:xfrm>
-            <a:off x="289800" y="3106080"/>
-            <a:ext cx="1033200" cy="1370520"/>
+            <a:off x="289800" y="3593160"/>
+            <a:ext cx="1032840" cy="396000"/>
           </a:xfrm>
           <a:prstGeom prst="rect">
             <a:avLst/>
@@ -2624,7 +2713,7 @@
           <a:fontRef idx="minor"/>
         </p:style>
         <p:txBody>
-          <a:bodyPr lIns="90000" rIns="90000" tIns="45000" bIns="45000" anchor="t" anchorCtr="1">
+          <a:bodyPr lIns="90000" rIns="90000" tIns="45000" bIns="45000" anchor="ctr" anchorCtr="1">
             <a:spAutoFit/>
           </a:bodyPr>
           <a:p>
@@ -2641,6 +2730,7 @@
                 <a:effectLst/>
                 <a:uFillTx/>
                 <a:latin typeface="Nimbus Roman"/>
+                <a:ea typeface="DejaVu Sans"/>
               </a:rPr>
               <a:t>{{caption_8}}</a:t>
             </a:r>
@@ -2678,8 +2768,8 @@
         </p:nvSpPr>
         <p:spPr>
           <a:xfrm>
-            <a:off x="308520" y="6153840"/>
-            <a:ext cx="1023120" cy="1317240"/>
+            <a:off x="308520" y="6614280"/>
+            <a:ext cx="1022760" cy="396000"/>
           </a:xfrm>
           <a:prstGeom prst="rect">
             <a:avLst/>
@@ -2696,7 +2786,7 @@
           <a:fontRef idx="minor"/>
         </p:style>
         <p:txBody>
-          <a:bodyPr lIns="90000" rIns="90000" tIns="45000" bIns="45000" anchor="t" anchorCtr="1">
+          <a:bodyPr lIns="90000" rIns="90000" tIns="45000" bIns="45000" anchor="ctr" anchorCtr="1">
             <a:spAutoFit/>
           </a:bodyPr>
           <a:p>
@@ -2713,6 +2803,7 @@
                 <a:effectLst/>
                 <a:uFillTx/>
                 <a:latin typeface="Nimbus Roman"/>
+                <a:ea typeface="DejaVu Sans"/>
               </a:rPr>
               <a:t>{{caption_10}}</a:t>
             </a:r>
@@ -2750,8 +2841,8 @@
         </p:nvSpPr>
         <p:spPr>
           <a:xfrm>
-            <a:off x="1879200" y="4596840"/>
-            <a:ext cx="1149480" cy="1464480"/>
+            <a:off x="1879200" y="5130720"/>
+            <a:ext cx="1149120" cy="396000"/>
           </a:xfrm>
           <a:prstGeom prst="rect">
             <a:avLst/>
@@ -2768,7 +2859,7 @@
           <a:fontRef idx="minor"/>
         </p:style>
         <p:txBody>
-          <a:bodyPr lIns="90000" rIns="90000" tIns="45000" bIns="45000" anchor="t" anchorCtr="1">
+          <a:bodyPr lIns="90000" rIns="90000" tIns="45000" bIns="45000" anchor="ctr" anchorCtr="1">
             <a:spAutoFit/>
           </a:bodyPr>
           <a:p>
@@ -2785,6 +2876,7 @@
                 <a:effectLst/>
                 <a:uFillTx/>
                 <a:latin typeface="Nimbus Roman"/>
+                <a:ea typeface="DejaVu Sans"/>
               </a:rPr>
               <a:t>{{caption_9}}</a:t>
             </a:r>
@@ -2823,7 +2915,7 @@
         <p:spPr>
           <a:xfrm>
             <a:off x="3778200" y="341640"/>
-            <a:ext cx="2587320" cy="444240"/>
+            <a:ext cx="2586960" cy="443880"/>
           </a:xfrm>
           <a:prstGeom prst="rect">
             <a:avLst/>
@@ -2881,7 +2973,7 @@
         <p:spPr>
           <a:xfrm>
             <a:off x="7132320" y="342000"/>
-            <a:ext cx="2587320" cy="444240"/>
+            <a:ext cx="2586960" cy="443880"/>
           </a:xfrm>
           <a:prstGeom prst="rect">
             <a:avLst/>
@@ -2939,7 +3031,7 @@
         <p:spPr>
           <a:xfrm>
             <a:off x="3600000" y="786240"/>
-            <a:ext cx="2931120" cy="6593400"/>
+            <a:ext cx="2930760" cy="6593040"/>
           </a:xfrm>
           <a:prstGeom prst="rect">
             <a:avLst/>
@@ -2979,6 +3071,7 @@
                 <a:effectLst/>
                 <a:uFillTx/>
                 <a:latin typeface="Nimbus Roman"/>
+                <a:ea typeface="DejaVu Sans"/>
               </a:rPr>
               <a:t>{{FEATURE_BLOCK}}</a:t>
             </a:r>
@@ -3002,7 +3095,7 @@
         <p:spPr>
           <a:xfrm>
             <a:off x="6966720" y="768960"/>
-            <a:ext cx="2952360" cy="410400"/>
+            <a:ext cx="2952000" cy="409680"/>
           </a:xfrm>
           <a:prstGeom prst="rect">
             <a:avLst/>
@@ -3039,6 +3132,7 @@
                 <a:effectLst/>
                 <a:uFillTx/>
                 <a:latin typeface="Nimbus Roman"/>
+                <a:ea typeface="DejaVu Sans"/>
               </a:rPr>
               <a:t>{{ROOM_BLOCK}}</a:t>
             </a:r>
@@ -3062,7 +3156,7 @@
         <p:spPr>
           <a:xfrm>
             <a:off x="7091640" y="6444720"/>
-            <a:ext cx="2587320" cy="444240"/>
+            <a:ext cx="2586960" cy="443880"/>
           </a:xfrm>
           <a:prstGeom prst="rect">
             <a:avLst/>
@@ -3096,6 +3190,7 @@
                 <a:effectLst/>
                 <a:uFillTx/>
                 <a:latin typeface="Nimbus Roman"/>
+                <a:ea typeface="DejaVu Sans"/>
               </a:rPr>
               <a:t>{{TOTAL}}</a:t>
             </a:r>

--- a/Brochure_Template.pptx
+++ b/Brochure_Template.pptx
@@ -3,10 +3,11 @@
 <p:presentation xmlns:a="http://schemas.openxmlformats.org/drawingml/2006/main" xmlns:p="http://schemas.openxmlformats.org/presentationml/2006/main" xmlns:r="http://schemas.openxmlformats.org/officeDocument/2006/relationships" xmlns:p14="http://schemas.microsoft.com/office/powerpoint/2010/main" xmlns:p15="http://schemas.microsoft.com/office/powerpoint/2012/main" xmlns:mc="http://schemas.openxmlformats.org/markup-compatibility/2006">
   <p:sldMasterIdLst>
     <p:sldMasterId id="2147483648" r:id="rId2"/>
+    <p:sldMasterId id="2147483650" r:id="rId3"/>
   </p:sldMasterIdLst>
   <p:sldIdLst>
-    <p:sldId id="256" r:id="rId3"/>
-    <p:sldId id="257" r:id="rId4"/>
+    <p:sldId id="256" r:id="rId4"/>
+    <p:sldId id="257" r:id="rId5"/>
   </p:sldIdLst>
   <p:sldSz cx="10058400" cy="7772400"/>
   <p:notesSz cx="7772400" cy="10058400"/>
@@ -32,7 +33,7 @@
       </p:grpSpPr>
       <p:sp>
         <p:nvSpPr>
-          <p:cNvPr id="2" name="PlaceHolder 1"/>
+          <p:cNvPr id="7" name="PlaceHolder 1"/>
           <p:cNvSpPr>
             <a:spLocks noGrp="1"/>
           </p:cNvSpPr>
@@ -42,8 +43,8 @@
         </p:nvSpPr>
         <p:spPr>
           <a:xfrm>
-            <a:off x="502920" y="820800"/>
-            <a:ext cx="9051480" cy="274680"/>
+            <a:off x="502920" y="645480"/>
+            <a:ext cx="9051120" cy="625320"/>
           </a:xfrm>
           <a:prstGeom prst="rect">
             <a:avLst/>
@@ -58,51 +59,34 @@
             <a:spAutoFit/>
           </a:bodyPr>
           <a:p>
-            <a:pPr indent="0">
-              <a:lnSpc>
-                <a:spcPct val="100000"/>
-              </a:lnSpc>
+            <a:pPr indent="0" algn="ctr">
               <a:buNone/>
-              <a:tabLst>
-                <a:tab algn="l" pos="0"/>
-              </a:tabLst>
-            </a:pPr>
-            <a:r>
-              <a:rPr lang="en-CA" sz="1800" b="0" u="none" strike="noStrike">
-                <a:solidFill>
-                  <a:srgbClr val="000000"/>
-                </a:solidFill>
-                <a:effectLst/>
-                <a:uFillTx/>
-                <a:latin typeface="Arial"/>
-              </a:rPr>
-              <a:t>Click to edit the title text format</a:t>
-            </a:r>
-            <a:endParaRPr lang="en-CA" sz="1800" b="0" u="none" strike="noStrike">
-              <a:solidFill>
-                <a:srgbClr val="000000"/>
-              </a:solidFill>
-              <a:effectLst/>
-              <a:uFillTx/>
-              <a:latin typeface="Arial"/>
-            </a:endParaRPr>
-          </a:p>
-        </p:txBody>
-      </p:sp>
-      <p:sp>
-        <p:nvSpPr>
-          <p:cNvPr id="3" name="PlaceHolder 2"/>
+            </a:pPr>
+            <a:endParaRPr lang="en-CA" sz="4400" b="0" u="none" strike="noStrike">
+              <a:solidFill>
+                <a:srgbClr val="000000"/>
+              </a:solidFill>
+              <a:effectLst/>
+              <a:uFillTx/>
+              <a:latin typeface="Arial"/>
+            </a:endParaRPr>
+          </a:p>
+        </p:txBody>
+      </p:sp>
+      <p:sp>
+        <p:nvSpPr>
+          <p:cNvPr id="8" name="PlaceHolder 2"/>
           <p:cNvSpPr>
             <a:spLocks noGrp="1"/>
           </p:cNvSpPr>
           <p:nvPr>
-            <p:ph type="body"/>
+            <p:ph/>
           </p:nvPr>
         </p:nvSpPr>
         <p:spPr>
           <a:xfrm>
             <a:off x="502920" y="1818000"/>
-            <a:ext cx="9051480" cy="4506840"/>
+            <a:ext cx="9051120" cy="4506480"/>
           </a:xfrm>
           <a:prstGeom prst="rect">
             <a:avLst/>
@@ -117,242 +101,13 @@
             <a:normAutofit/>
           </a:bodyPr>
           <a:p>
-            <a:pPr marL="432000" indent="-324000">
-              <a:lnSpc>
-                <a:spcPct val="100000"/>
-              </a:lnSpc>
+            <a:pPr indent="0">
               <a:spcBef>
                 <a:spcPts val="1417"/>
               </a:spcBef>
-              <a:buClr>
-                <a:srgbClr val="000000"/>
-              </a:buClr>
-              <a:buSzPct val="45000"/>
-              <a:buFont typeface="Wingdings" charset="2"/>
-              <a:buChar char=""/>
-            </a:pPr>
-            <a:r>
-              <a:rPr lang="en-CA" sz="1800" b="0" u="none" strike="noStrike">
-                <a:solidFill>
-                  <a:srgbClr val="000000"/>
-                </a:solidFill>
-                <a:effectLst/>
-                <a:uFillTx/>
-                <a:latin typeface="Arial"/>
-              </a:rPr>
-              <a:t>Click to edit the outline text format</a:t>
-            </a:r>
-            <a:endParaRPr lang="en-CA" sz="1800" b="0" u="none" strike="noStrike">
-              <a:solidFill>
-                <a:srgbClr val="000000"/>
-              </a:solidFill>
-              <a:effectLst/>
-              <a:uFillTx/>
-              <a:latin typeface="Arial"/>
-            </a:endParaRPr>
-          </a:p>
-          <a:p>
-            <a:pPr marL="864000" lvl="1" indent="-324000">
-              <a:lnSpc>
-                <a:spcPct val="100000"/>
-              </a:lnSpc>
-              <a:spcBef>
-                <a:spcPts val="1134"/>
-              </a:spcBef>
-              <a:buClr>
-                <a:srgbClr val="000000"/>
-              </a:buClr>
-              <a:buSzPct val="75000"/>
-              <a:buFont typeface="Symbol" charset="2"/>
-              <a:buChar char=""/>
-            </a:pPr>
-            <a:r>
-              <a:rPr lang="en-CA" sz="1800" b="0" u="none" strike="noStrike">
-                <a:solidFill>
-                  <a:srgbClr val="000000"/>
-                </a:solidFill>
-                <a:effectLst/>
-                <a:uFillTx/>
-                <a:latin typeface="Arial"/>
-              </a:rPr>
-              <a:t>Second Outline Level</a:t>
-            </a:r>
-            <a:endParaRPr lang="en-CA" sz="1800" b="0" u="none" strike="noStrike">
-              <a:solidFill>
-                <a:srgbClr val="000000"/>
-              </a:solidFill>
-              <a:effectLst/>
-              <a:uFillTx/>
-              <a:latin typeface="Arial"/>
-            </a:endParaRPr>
-          </a:p>
-          <a:p>
-            <a:pPr marL="1296000" lvl="2" indent="-288000">
-              <a:lnSpc>
-                <a:spcPct val="100000"/>
-              </a:lnSpc>
-              <a:spcBef>
-                <a:spcPts val="850"/>
-              </a:spcBef>
-              <a:buClr>
-                <a:srgbClr val="000000"/>
-              </a:buClr>
-              <a:buSzPct val="45000"/>
-              <a:buFont typeface="Wingdings" charset="2"/>
-              <a:buChar char=""/>
-            </a:pPr>
-            <a:r>
-              <a:rPr lang="en-CA" sz="1800" b="0" u="none" strike="noStrike">
-                <a:solidFill>
-                  <a:srgbClr val="000000"/>
-                </a:solidFill>
-                <a:effectLst/>
-                <a:uFillTx/>
-                <a:latin typeface="Arial"/>
-              </a:rPr>
-              <a:t>Third Outline Level</a:t>
-            </a:r>
-            <a:endParaRPr lang="en-CA" sz="1800" b="0" u="none" strike="noStrike">
-              <a:solidFill>
-                <a:srgbClr val="000000"/>
-              </a:solidFill>
-              <a:effectLst/>
-              <a:uFillTx/>
-              <a:latin typeface="Arial"/>
-            </a:endParaRPr>
-          </a:p>
-          <a:p>
-            <a:pPr marL="1728000" lvl="3" indent="-216000">
-              <a:lnSpc>
-                <a:spcPct val="100000"/>
-              </a:lnSpc>
-              <a:spcBef>
-                <a:spcPts val="567"/>
-              </a:spcBef>
-              <a:buClr>
-                <a:srgbClr val="000000"/>
-              </a:buClr>
-              <a:buSzPct val="75000"/>
-              <a:buFont typeface="Symbol" charset="2"/>
-              <a:buChar char=""/>
-            </a:pPr>
-            <a:r>
-              <a:rPr lang="en-CA" sz="1800" b="0" u="none" strike="noStrike">
-                <a:solidFill>
-                  <a:srgbClr val="000000"/>
-                </a:solidFill>
-                <a:effectLst/>
-                <a:uFillTx/>
-                <a:latin typeface="Arial"/>
-              </a:rPr>
-              <a:t>Fourth Outline Level</a:t>
-            </a:r>
-            <a:endParaRPr lang="en-CA" sz="1800" b="0" u="none" strike="noStrike">
-              <a:solidFill>
-                <a:srgbClr val="000000"/>
-              </a:solidFill>
-              <a:effectLst/>
-              <a:uFillTx/>
-              <a:latin typeface="Arial"/>
-            </a:endParaRPr>
-          </a:p>
-          <a:p>
-            <a:pPr marL="2160000" lvl="4" indent="-216000">
-              <a:lnSpc>
-                <a:spcPct val="100000"/>
-              </a:lnSpc>
-              <a:spcBef>
-                <a:spcPts val="283"/>
-              </a:spcBef>
-              <a:buClr>
-                <a:srgbClr val="000000"/>
-              </a:buClr>
-              <a:buSzPct val="45000"/>
-              <a:buFont typeface="Wingdings" charset="2"/>
-              <a:buChar char=""/>
-            </a:pPr>
-            <a:r>
-              <a:rPr lang="en-CA" sz="1800" b="0" u="none" strike="noStrike">
-                <a:solidFill>
-                  <a:srgbClr val="000000"/>
-                </a:solidFill>
-                <a:effectLst/>
-                <a:uFillTx/>
-                <a:latin typeface="Arial"/>
-              </a:rPr>
-              <a:t>Fifth Outline Level</a:t>
-            </a:r>
-            <a:endParaRPr lang="en-CA" sz="1800" b="0" u="none" strike="noStrike">
-              <a:solidFill>
-                <a:srgbClr val="000000"/>
-              </a:solidFill>
-              <a:effectLst/>
-              <a:uFillTx/>
-              <a:latin typeface="Arial"/>
-            </a:endParaRPr>
-          </a:p>
-          <a:p>
-            <a:pPr marL="2592000" lvl="5" indent="-216000">
-              <a:lnSpc>
-                <a:spcPct val="100000"/>
-              </a:lnSpc>
-              <a:spcBef>
-                <a:spcPts val="283"/>
-              </a:spcBef>
-              <a:buClr>
-                <a:srgbClr val="000000"/>
-              </a:buClr>
-              <a:buSzPct val="45000"/>
-              <a:buFont typeface="Wingdings" charset="2"/>
-              <a:buChar char=""/>
-            </a:pPr>
-            <a:r>
-              <a:rPr lang="en-CA" sz="1800" b="0" u="none" strike="noStrike">
-                <a:solidFill>
-                  <a:srgbClr val="000000"/>
-                </a:solidFill>
-                <a:effectLst/>
-                <a:uFillTx/>
-                <a:latin typeface="Arial"/>
-              </a:rPr>
-              <a:t>Sixth Outline Level</a:t>
-            </a:r>
-            <a:endParaRPr lang="en-CA" sz="1800" b="0" u="none" strike="noStrike">
-              <a:solidFill>
-                <a:srgbClr val="000000"/>
-              </a:solidFill>
-              <a:effectLst/>
-              <a:uFillTx/>
-              <a:latin typeface="Arial"/>
-            </a:endParaRPr>
-          </a:p>
-          <a:p>
-            <a:pPr marL="3024000" lvl="6" indent="-216000">
-              <a:lnSpc>
-                <a:spcPct val="100000"/>
-              </a:lnSpc>
-              <a:spcBef>
-                <a:spcPts val="283"/>
-              </a:spcBef>
-              <a:buClr>
-                <a:srgbClr val="000000"/>
-              </a:buClr>
-              <a:buSzPct val="45000"/>
-              <a:buFont typeface="Wingdings" charset="2"/>
-              <a:buChar char=""/>
-            </a:pPr>
-            <a:r>
-              <a:rPr lang="en-CA" sz="1800" b="0" u="none" strike="noStrike">
-                <a:solidFill>
-                  <a:srgbClr val="000000"/>
-                </a:solidFill>
-                <a:effectLst/>
-                <a:uFillTx/>
-                <a:latin typeface="Arial"/>
-              </a:rPr>
-              <a:t>Seventh Outline Level</a:t>
-            </a:r>
-            <a:endParaRPr lang="en-CA" sz="1800" b="0" u="none" strike="noStrike">
+              <a:buNone/>
+            </a:pPr>
+            <a:endParaRPr lang="en-CA" sz="3200" b="0" u="none" strike="noStrike">
               <a:solidFill>
                 <a:srgbClr val="000000"/>
               </a:solidFill>
@@ -373,71 +128,13 @@
             <p:ph type="ftr" idx="1"/>
           </p:nvPr>
         </p:nvSpPr>
-        <p:spPr>
-          <a:xfrm>
-            <a:off x="3439440" y="7080120"/>
-            <a:ext cx="3187440" cy="534960"/>
-          </a:xfrm>
-          <a:prstGeom prst="rect">
-            <a:avLst/>
-          </a:prstGeom>
-          <a:noFill/>
-          <a:ln w="0">
-            <a:noFill/>
-          </a:ln>
-        </p:spPr>
-        <p:txBody>
-          <a:bodyPr lIns="0" rIns="0" tIns="0" bIns="0" anchor="t">
-            <a:noAutofit/>
-          </a:bodyPr>
-          <a:lstStyle>
-            <a:lvl1pPr indent="0" algn="ctr">
-              <a:lnSpc>
-                <a:spcPct val="100000"/>
-              </a:lnSpc>
-              <a:buNone/>
-              <a:tabLst>
-                <a:tab algn="l" pos="0"/>
-              </a:tabLst>
-              <a:defRPr lang="en-CA" sz="1400" b="0" u="none" strike="noStrike">
-                <a:solidFill>
-                  <a:srgbClr val="000000"/>
-                </a:solidFill>
-                <a:effectLst/>
-                <a:uFillTx/>
-                <a:latin typeface="Times New Roman"/>
-              </a:defRPr>
-            </a:lvl1pPr>
-          </a:lstStyle>
-          <a:p>
-            <a:pPr indent="0" algn="ctr">
-              <a:lnSpc>
-                <a:spcPct val="100000"/>
-              </a:lnSpc>
-              <a:buNone/>
-              <a:tabLst>
-                <a:tab algn="l" pos="0"/>
-              </a:tabLst>
-            </a:pPr>
-            <a:r>
-              <a:rPr lang="en-CA" sz="1400" b="0" u="none" strike="noStrike">
-                <a:solidFill>
-                  <a:srgbClr val="000000"/>
-                </a:solidFill>
-                <a:effectLst/>
-                <a:uFillTx/>
-                <a:latin typeface="Times New Roman"/>
-              </a:rPr>
-              <a:t>&lt;footer&gt;</a:t>
-            </a:r>
-            <a:endParaRPr lang="en-CA" sz="1400" b="0" u="none" strike="noStrike">
-              <a:solidFill>
-                <a:srgbClr val="000000"/>
-              </a:solidFill>
-              <a:effectLst/>
-              <a:uFillTx/>
-              <a:latin typeface="Times New Roman"/>
-            </a:endParaRPr>
+        <p:spPr/>
+        <p:txBody>
+          <a:bodyPr/>
+          <a:p>
+            <a:r>
+              <a:t>Footer</a:t>
+            </a:r>
           </a:p>
         </p:txBody>
       </p:sp>
@@ -451,71 +148,13 @@
             <p:ph type="sldNum" idx="2"/>
           </p:nvPr>
         </p:nvSpPr>
-        <p:spPr>
-          <a:xfrm>
-            <a:off x="7211160" y="7080120"/>
-            <a:ext cx="2342520" cy="534960"/>
-          </a:xfrm>
-          <a:prstGeom prst="rect">
-            <a:avLst/>
-          </a:prstGeom>
-          <a:noFill/>
-          <a:ln w="0">
-            <a:noFill/>
-          </a:ln>
-        </p:spPr>
-        <p:txBody>
-          <a:bodyPr lIns="0" rIns="0" tIns="0" bIns="0" anchor="t">
-            <a:noAutofit/>
-          </a:bodyPr>
-          <a:lstStyle>
-            <a:lvl1pPr indent="0" algn="r">
-              <a:lnSpc>
-                <a:spcPct val="100000"/>
-              </a:lnSpc>
-              <a:buNone/>
-              <a:tabLst>
-                <a:tab algn="l" pos="0"/>
-              </a:tabLst>
-              <a:defRPr lang="en-CA" sz="1400" b="0" u="none" strike="noStrike">
-                <a:solidFill>
-                  <a:srgbClr val="000000"/>
-                </a:solidFill>
-                <a:effectLst/>
-                <a:uFillTx/>
-                <a:latin typeface="Times New Roman"/>
-              </a:defRPr>
-            </a:lvl1pPr>
-          </a:lstStyle>
-          <a:p>
-            <a:pPr indent="0" algn="r">
-              <a:lnSpc>
-                <a:spcPct val="100000"/>
-              </a:lnSpc>
-              <a:buNone/>
-              <a:tabLst>
-                <a:tab algn="l" pos="0"/>
-              </a:tabLst>
-            </a:pPr>
-            <a:fld id="{190B3A3F-89E4-4D28-AAD4-4D349F5C9963}" type="slidenum">
-              <a:rPr lang="en-CA" sz="1400" b="0" u="none" strike="noStrike">
-                <a:solidFill>
-                  <a:srgbClr val="000000"/>
-                </a:solidFill>
-                <a:effectLst/>
-                <a:uFillTx/>
-                <a:latin typeface="Times New Roman"/>
-              </a:rPr>
-              <a:t>&lt;number&gt;</a:t>
+        <p:spPr/>
+        <p:txBody>
+          <a:bodyPr/>
+          <a:p>
+            <a:fld id="{18E3552D-4D6A-41E1-AA3C-97E60097A2DC}" type="slidenum">
+              <a:t>&lt;#&gt;</a:t>
             </a:fld>
-            <a:endParaRPr lang="en-CA" sz="1400" b="0" u="none" strike="noStrike">
-              <a:solidFill>
-                <a:srgbClr val="000000"/>
-              </a:solidFill>
-              <a:effectLst/>
-              <a:uFillTx/>
-              <a:latin typeface="Times New Roman"/>
-            </a:endParaRPr>
           </a:p>
         </p:txBody>
       </p:sp>
@@ -529,71 +168,14 @@
             <p:ph type="dt" idx="3"/>
           </p:nvPr>
         </p:nvSpPr>
-        <p:spPr>
-          <a:xfrm>
-            <a:off x="502920" y="7080120"/>
-            <a:ext cx="2342520" cy="534960"/>
-          </a:xfrm>
-          <a:prstGeom prst="rect">
-            <a:avLst/>
-          </a:prstGeom>
-          <a:noFill/>
-          <a:ln w="0">
-            <a:noFill/>
-          </a:ln>
-        </p:spPr>
-        <p:txBody>
-          <a:bodyPr lIns="0" rIns="0" tIns="0" bIns="0" anchor="t">
-            <a:noAutofit/>
-          </a:bodyPr>
-          <a:lstStyle>
-            <a:lvl1pPr indent="0">
-              <a:lnSpc>
-                <a:spcPct val="100000"/>
-              </a:lnSpc>
-              <a:buNone/>
-              <a:tabLst>
-                <a:tab algn="l" pos="0"/>
-              </a:tabLst>
-              <a:defRPr lang="en-CA" sz="1400" b="0" u="none" strike="noStrike">
-                <a:solidFill>
-                  <a:srgbClr val="000000"/>
-                </a:solidFill>
-                <a:effectLst/>
-                <a:uFillTx/>
-                <a:latin typeface="Times New Roman"/>
-              </a:defRPr>
-            </a:lvl1pPr>
-          </a:lstStyle>
-          <a:p>
-            <a:pPr indent="0">
-              <a:lnSpc>
-                <a:spcPct val="100000"/>
-              </a:lnSpc>
-              <a:buNone/>
-              <a:tabLst>
-                <a:tab algn="l" pos="0"/>
-              </a:tabLst>
-            </a:pPr>
-            <a:r>
-              <a:rPr lang="en-CA" sz="1400" b="0" u="none" strike="noStrike">
-                <a:solidFill>
-                  <a:srgbClr val="000000"/>
-                </a:solidFill>
-                <a:effectLst/>
-                <a:uFillTx/>
-                <a:latin typeface="Times New Roman"/>
-              </a:rPr>
-              <a:t>&lt;date/time&gt;</a:t>
-            </a:r>
-            <a:endParaRPr lang="en-CA" sz="1400" b="0" u="none" strike="noStrike">
-              <a:solidFill>
-                <a:srgbClr val="000000"/>
-              </a:solidFill>
-              <a:effectLst/>
-              <a:uFillTx/>
-              <a:latin typeface="Times New Roman"/>
-            </a:endParaRPr>
+        <p:spPr/>
+        <p:txBody>
+          <a:bodyPr/>
+          <a:p>
+            <a:r>
+              <a:rPr lang="en-CA"/>
+              <a:t/>
+            </a:r>
           </a:p>
         </p:txBody>
       </p:sp>
@@ -621,7 +203,7 @@
       </p:grpSpPr>
       <p:sp>
         <p:nvSpPr>
-          <p:cNvPr id="7" name="PlaceHolder 1"/>
+          <p:cNvPr id="14" name="PlaceHolder 1"/>
           <p:cNvSpPr>
             <a:spLocks noGrp="1"/>
           </p:cNvSpPr>
@@ -631,8 +213,8 @@
         </p:nvSpPr>
         <p:spPr>
           <a:xfrm>
-            <a:off x="502920" y="820800"/>
-            <a:ext cx="9051480" cy="274680"/>
+            <a:off x="502920" y="645480"/>
+            <a:ext cx="9051120" cy="625320"/>
           </a:xfrm>
           <a:prstGeom prst="rect">
             <a:avLst/>
@@ -647,40 +229,65 @@
             <a:spAutoFit/>
           </a:bodyPr>
           <a:p>
-            <a:pPr indent="0">
-              <a:lnSpc>
-                <a:spcPct val="100000"/>
-              </a:lnSpc>
+            <a:pPr indent="0" algn="ctr">
               <a:buNone/>
-              <a:tabLst>
-                <a:tab algn="l" pos="0"/>
-              </a:tabLst>
-            </a:pPr>
-            <a:r>
-              <a:rPr lang="en-CA" sz="1800" b="0" u="none" strike="noStrike">
-                <a:solidFill>
-                  <a:srgbClr val="000000"/>
-                </a:solidFill>
-                <a:effectLst/>
-                <a:uFillTx/>
-                <a:latin typeface="Arial"/>
-              </a:rPr>
-              <a:t>Click to edit the title text format</a:t>
-            </a:r>
-            <a:endParaRPr lang="en-CA" sz="1800" b="0" u="none" strike="noStrike">
-              <a:solidFill>
-                <a:srgbClr val="000000"/>
-              </a:solidFill>
-              <a:effectLst/>
-              <a:uFillTx/>
-              <a:latin typeface="Arial"/>
-            </a:endParaRPr>
-          </a:p>
-        </p:txBody>
-      </p:sp>
-      <p:sp>
-        <p:nvSpPr>
-          <p:cNvPr id="8" name="PlaceHolder 2"/>
+            </a:pPr>
+            <a:endParaRPr lang="en-CA" sz="4400" b="0" u="none" strike="noStrike">
+              <a:solidFill>
+                <a:srgbClr val="000000"/>
+              </a:solidFill>
+              <a:effectLst/>
+              <a:uFillTx/>
+              <a:latin typeface="Arial"/>
+            </a:endParaRPr>
+          </a:p>
+        </p:txBody>
+      </p:sp>
+      <p:sp>
+        <p:nvSpPr>
+          <p:cNvPr id="15" name="PlaceHolder 2"/>
+          <p:cNvSpPr>
+            <a:spLocks noGrp="1"/>
+          </p:cNvSpPr>
+          <p:nvPr>
+            <p:ph type="subTitle"/>
+          </p:nvPr>
+        </p:nvSpPr>
+        <p:spPr>
+          <a:xfrm>
+            <a:off x="502920" y="1818000"/>
+            <a:ext cx="9051120" cy="4506480"/>
+          </a:xfrm>
+          <a:prstGeom prst="rect">
+            <a:avLst/>
+          </a:prstGeom>
+          <a:noFill/>
+          <a:ln w="0">
+            <a:noFill/>
+          </a:ln>
+        </p:spPr>
+        <p:txBody>
+          <a:bodyPr lIns="0" rIns="0" tIns="0" bIns="0" anchor="ctr">
+            <a:spAutoFit/>
+          </a:bodyPr>
+          <a:p>
+            <a:pPr indent="0" algn="ctr">
+              <a:buNone/>
+            </a:pPr>
+            <a:endParaRPr lang="en-CA" sz="3200" b="0" u="none" strike="noStrike">
+              <a:solidFill>
+                <a:srgbClr val="000000"/>
+              </a:solidFill>
+              <a:effectLst/>
+              <a:uFillTx/>
+              <a:latin typeface="Arial"/>
+            </a:endParaRPr>
+          </a:p>
+        </p:txBody>
+      </p:sp>
+      <p:sp>
+        <p:nvSpPr>
+          <p:cNvPr id="4" name="PlaceHolder 3"/>
           <p:cNvSpPr>
             <a:spLocks noGrp="1"/>
           </p:cNvSpPr>
@@ -688,77 +295,19 @@
             <p:ph type="ftr" idx="4"/>
           </p:nvPr>
         </p:nvSpPr>
-        <p:spPr>
-          <a:xfrm>
-            <a:off x="3439440" y="7080120"/>
-            <a:ext cx="3187440" cy="534960"/>
-          </a:xfrm>
-          <a:prstGeom prst="rect">
-            <a:avLst/>
-          </a:prstGeom>
-          <a:noFill/>
-          <a:ln w="0">
-            <a:noFill/>
-          </a:ln>
-        </p:spPr>
-        <p:txBody>
-          <a:bodyPr lIns="0" rIns="0" tIns="0" bIns="0" anchor="t">
-            <a:noAutofit/>
-          </a:bodyPr>
-          <a:lstStyle>
-            <a:lvl1pPr indent="0" algn="ctr">
-              <a:lnSpc>
-                <a:spcPct val="100000"/>
-              </a:lnSpc>
-              <a:buNone/>
-              <a:tabLst>
-                <a:tab algn="l" pos="0"/>
-              </a:tabLst>
-              <a:defRPr lang="en-CA" sz="1400" b="0" u="none" strike="noStrike">
-                <a:solidFill>
-                  <a:srgbClr val="000000"/>
-                </a:solidFill>
-                <a:effectLst/>
-                <a:uFillTx/>
-                <a:latin typeface="Times New Roman"/>
-              </a:defRPr>
-            </a:lvl1pPr>
-          </a:lstStyle>
-          <a:p>
-            <a:pPr indent="0" algn="ctr">
-              <a:lnSpc>
-                <a:spcPct val="100000"/>
-              </a:lnSpc>
-              <a:buNone/>
-              <a:tabLst>
-                <a:tab algn="l" pos="0"/>
-              </a:tabLst>
-            </a:pPr>
-            <a:r>
-              <a:rPr lang="en-CA" sz="1400" b="0" u="none" strike="noStrike">
-                <a:solidFill>
-                  <a:srgbClr val="000000"/>
-                </a:solidFill>
-                <a:effectLst/>
-                <a:uFillTx/>
-                <a:latin typeface="Times New Roman"/>
-              </a:rPr>
-              <a:t>&lt;footer&gt;</a:t>
-            </a:r>
-            <a:endParaRPr lang="en-CA" sz="1400" b="0" u="none" strike="noStrike">
-              <a:solidFill>
-                <a:srgbClr val="000000"/>
-              </a:solidFill>
-              <a:effectLst/>
-              <a:uFillTx/>
-              <a:latin typeface="Times New Roman"/>
-            </a:endParaRPr>
-          </a:p>
-        </p:txBody>
-      </p:sp>
-      <p:sp>
-        <p:nvSpPr>
-          <p:cNvPr id="9" name="PlaceHolder 3"/>
+        <p:spPr/>
+        <p:txBody>
+          <a:bodyPr/>
+          <a:p>
+            <a:r>
+              <a:t>Footer</a:t>
+            </a:r>
+          </a:p>
+        </p:txBody>
+      </p:sp>
+      <p:sp>
+        <p:nvSpPr>
+          <p:cNvPr id="5" name="PlaceHolder 4"/>
           <p:cNvSpPr>
             <a:spLocks noGrp="1"/>
           </p:cNvSpPr>
@@ -766,77 +315,19 @@
             <p:ph type="sldNum" idx="5"/>
           </p:nvPr>
         </p:nvSpPr>
-        <p:spPr>
-          <a:xfrm>
-            <a:off x="7211160" y="7080120"/>
-            <a:ext cx="2342520" cy="534960"/>
-          </a:xfrm>
-          <a:prstGeom prst="rect">
-            <a:avLst/>
-          </a:prstGeom>
-          <a:noFill/>
-          <a:ln w="0">
-            <a:noFill/>
-          </a:ln>
-        </p:spPr>
-        <p:txBody>
-          <a:bodyPr lIns="0" rIns="0" tIns="0" bIns="0" anchor="t">
-            <a:noAutofit/>
-          </a:bodyPr>
-          <a:lstStyle>
-            <a:lvl1pPr indent="0" algn="r">
-              <a:lnSpc>
-                <a:spcPct val="100000"/>
-              </a:lnSpc>
-              <a:buNone/>
-              <a:tabLst>
-                <a:tab algn="l" pos="0"/>
-              </a:tabLst>
-              <a:defRPr lang="en-CA" sz="1400" b="0" u="none" strike="noStrike">
-                <a:solidFill>
-                  <a:srgbClr val="000000"/>
-                </a:solidFill>
-                <a:effectLst/>
-                <a:uFillTx/>
-                <a:latin typeface="Times New Roman"/>
-              </a:defRPr>
-            </a:lvl1pPr>
-          </a:lstStyle>
-          <a:p>
-            <a:pPr indent="0" algn="r">
-              <a:lnSpc>
-                <a:spcPct val="100000"/>
-              </a:lnSpc>
-              <a:buNone/>
-              <a:tabLst>
-                <a:tab algn="l" pos="0"/>
-              </a:tabLst>
-            </a:pPr>
-            <a:fld id="{3FBE0CCD-27BA-4FD2-A4CA-60195DFF7F81}" type="slidenum">
-              <a:rPr lang="en-CA" sz="1400" b="0" u="none" strike="noStrike">
-                <a:solidFill>
-                  <a:srgbClr val="000000"/>
-                </a:solidFill>
-                <a:effectLst/>
-                <a:uFillTx/>
-                <a:latin typeface="Times New Roman"/>
-              </a:rPr>
-              <a:t>&lt;number&gt;</a:t>
+        <p:spPr/>
+        <p:txBody>
+          <a:bodyPr/>
+          <a:p>
+            <a:fld id="{0DA0300C-418E-41D8-B4E6-E1E98083FA07}" type="slidenum">
+              <a:t>&lt;#&gt;</a:t>
             </a:fld>
-            <a:endParaRPr lang="en-CA" sz="1400" b="0" u="none" strike="noStrike">
-              <a:solidFill>
-                <a:srgbClr val="000000"/>
-              </a:solidFill>
-              <a:effectLst/>
-              <a:uFillTx/>
-              <a:latin typeface="Times New Roman"/>
-            </a:endParaRPr>
-          </a:p>
-        </p:txBody>
-      </p:sp>
-      <p:sp>
-        <p:nvSpPr>
-          <p:cNvPr id="10" name="PlaceHolder 4"/>
+          </a:p>
+        </p:txBody>
+      </p:sp>
+      <p:sp>
+        <p:nvSpPr>
+          <p:cNvPr id="6" name="PlaceHolder 5"/>
           <p:cNvSpPr>
             <a:spLocks noGrp="1"/>
           </p:cNvSpPr>
@@ -844,345 +335,14 @@
             <p:ph type="dt" idx="6"/>
           </p:nvPr>
         </p:nvSpPr>
-        <p:spPr>
-          <a:xfrm>
-            <a:off x="502920" y="7080120"/>
-            <a:ext cx="2342520" cy="534960"/>
-          </a:xfrm>
-          <a:prstGeom prst="rect">
-            <a:avLst/>
-          </a:prstGeom>
-          <a:noFill/>
-          <a:ln w="0">
-            <a:noFill/>
-          </a:ln>
-        </p:spPr>
-        <p:txBody>
-          <a:bodyPr lIns="0" rIns="0" tIns="0" bIns="0" anchor="t">
-            <a:noAutofit/>
-          </a:bodyPr>
-          <a:lstStyle>
-            <a:lvl1pPr indent="0">
-              <a:lnSpc>
-                <a:spcPct val="100000"/>
-              </a:lnSpc>
-              <a:buNone/>
-              <a:tabLst>
-                <a:tab algn="l" pos="0"/>
-              </a:tabLst>
-              <a:defRPr lang="en-CA" sz="1400" b="0" u="none" strike="noStrike">
-                <a:solidFill>
-                  <a:srgbClr val="000000"/>
-                </a:solidFill>
-                <a:effectLst/>
-                <a:uFillTx/>
-                <a:latin typeface="Times New Roman"/>
-              </a:defRPr>
-            </a:lvl1pPr>
-          </a:lstStyle>
-          <a:p>
-            <a:pPr indent="0">
-              <a:lnSpc>
-                <a:spcPct val="100000"/>
-              </a:lnSpc>
-              <a:buNone/>
-              <a:tabLst>
-                <a:tab algn="l" pos="0"/>
-              </a:tabLst>
-            </a:pPr>
-            <a:r>
-              <a:rPr lang="en-CA" sz="1400" b="0" u="none" strike="noStrike">
-                <a:solidFill>
-                  <a:srgbClr val="000000"/>
-                </a:solidFill>
-                <a:effectLst/>
-                <a:uFillTx/>
-                <a:latin typeface="Times New Roman"/>
-              </a:rPr>
-              <a:t>&lt;date/time&gt;</a:t>
-            </a:r>
-            <a:endParaRPr lang="en-CA" sz="1400" b="0" u="none" strike="noStrike">
-              <a:solidFill>
-                <a:srgbClr val="000000"/>
-              </a:solidFill>
-              <a:effectLst/>
-              <a:uFillTx/>
-              <a:latin typeface="Times New Roman"/>
-            </a:endParaRPr>
-          </a:p>
-        </p:txBody>
-      </p:sp>
-      <p:sp>
-        <p:nvSpPr>
-          <p:cNvPr id="11" name="PlaceHolder 5"/>
-          <p:cNvSpPr>
-            <a:spLocks noGrp="1"/>
-          </p:cNvSpPr>
-          <p:nvPr>
-            <p:ph type="body"/>
-          </p:nvPr>
-        </p:nvSpPr>
-        <p:spPr>
-          <a:xfrm>
-            <a:off x="502920" y="1818720"/>
-            <a:ext cx="9051840" cy="4507200"/>
-          </a:xfrm>
-          <a:prstGeom prst="rect">
-            <a:avLst/>
-          </a:prstGeom>
-          <a:noFill/>
-          <a:ln w="0">
-            <a:noFill/>
-          </a:ln>
-        </p:spPr>
-        <p:txBody>
-          <a:bodyPr lIns="0" rIns="0" tIns="0" bIns="0" anchor="t">
-            <a:normAutofit/>
-          </a:bodyPr>
-          <a:p>
-            <a:pPr marL="432000" indent="-324000">
-              <a:lnSpc>
-                <a:spcPct val="100000"/>
-              </a:lnSpc>
-              <a:spcBef>
-                <a:spcPts val="1417"/>
-              </a:spcBef>
-              <a:buClr>
-                <a:srgbClr val="000000"/>
-              </a:buClr>
-              <a:buSzPct val="45000"/>
-              <a:buFont typeface="Wingdings" charset="2"/>
-              <a:buChar char=""/>
-            </a:pPr>
-            <a:r>
-              <a:rPr lang="en-CA" sz="3200" b="0" u="none" strike="noStrike">
-                <a:solidFill>
-                  <a:srgbClr val="000000"/>
-                </a:solidFill>
-                <a:effectLst/>
-                <a:uFillTx/>
-                <a:latin typeface="Arial"/>
-              </a:rPr>
-              <a:t>Click to edit the outline text format</a:t>
-            </a:r>
-            <a:endParaRPr lang="en-CA" sz="3200" b="0" u="none" strike="noStrike">
-              <a:solidFill>
-                <a:srgbClr val="000000"/>
-              </a:solidFill>
-              <a:effectLst/>
-              <a:uFillTx/>
-              <a:latin typeface="Arial"/>
-            </a:endParaRPr>
-          </a:p>
-          <a:p>
-            <a:pPr marL="864000" lvl="1" indent="-324000">
-              <a:lnSpc>
-                <a:spcPct val="100000"/>
-              </a:lnSpc>
-              <a:spcBef>
-                <a:spcPts val="1134"/>
-              </a:spcBef>
-              <a:buClr>
-                <a:srgbClr val="000000"/>
-              </a:buClr>
-              <a:buSzPct val="75000"/>
-              <a:buFont typeface="Symbol" charset="2"/>
-              <a:buChar char=""/>
-            </a:pPr>
-            <a:r>
-              <a:rPr lang="en-CA" sz="2800" b="0" u="none" strike="noStrike">
-                <a:solidFill>
-                  <a:srgbClr val="000000"/>
-                </a:solidFill>
-                <a:effectLst/>
-                <a:uFillTx/>
-                <a:latin typeface="Arial"/>
-              </a:rPr>
-              <a:t>Second Outline Level</a:t>
-            </a:r>
-            <a:endParaRPr lang="en-CA" sz="2800" b="0" u="none" strike="noStrike">
-              <a:solidFill>
-                <a:srgbClr val="000000"/>
-              </a:solidFill>
-              <a:effectLst/>
-              <a:uFillTx/>
-              <a:latin typeface="Arial"/>
-            </a:endParaRPr>
-          </a:p>
-          <a:p>
-            <a:pPr marL="1296000" lvl="2" indent="-288000">
-              <a:lnSpc>
-                <a:spcPct val="100000"/>
-              </a:lnSpc>
-              <a:spcBef>
-                <a:spcPts val="850"/>
-              </a:spcBef>
-              <a:buClr>
-                <a:srgbClr val="000000"/>
-              </a:buClr>
-              <a:buSzPct val="45000"/>
-              <a:buFont typeface="Wingdings" charset="2"/>
-              <a:buChar char=""/>
-            </a:pPr>
-            <a:r>
-              <a:rPr lang="en-CA" sz="2400" b="0" u="none" strike="noStrike">
-                <a:solidFill>
-                  <a:srgbClr val="000000"/>
-                </a:solidFill>
-                <a:effectLst/>
-                <a:uFillTx/>
-                <a:latin typeface="Arial"/>
-              </a:rPr>
-              <a:t>Third Outline Level</a:t>
-            </a:r>
-            <a:endParaRPr lang="en-CA" sz="2400" b="0" u="none" strike="noStrike">
-              <a:solidFill>
-                <a:srgbClr val="000000"/>
-              </a:solidFill>
-              <a:effectLst/>
-              <a:uFillTx/>
-              <a:latin typeface="Arial"/>
-            </a:endParaRPr>
-          </a:p>
-          <a:p>
-            <a:pPr marL="1728000" lvl="3" indent="-216000">
-              <a:lnSpc>
-                <a:spcPct val="100000"/>
-              </a:lnSpc>
-              <a:spcBef>
-                <a:spcPts val="567"/>
-              </a:spcBef>
-              <a:buClr>
-                <a:srgbClr val="000000"/>
-              </a:buClr>
-              <a:buSzPct val="75000"/>
-              <a:buFont typeface="Symbol" charset="2"/>
-              <a:buChar char=""/>
-            </a:pPr>
-            <a:r>
-              <a:rPr lang="en-CA" sz="2000" b="0" u="none" strike="noStrike">
-                <a:solidFill>
-                  <a:srgbClr val="000000"/>
-                </a:solidFill>
-                <a:effectLst/>
-                <a:uFillTx/>
-                <a:latin typeface="Arial"/>
-              </a:rPr>
-              <a:t>Fourth Outline Level</a:t>
-            </a:r>
-            <a:endParaRPr lang="en-CA" sz="2000" b="0" u="none" strike="noStrike">
-              <a:solidFill>
-                <a:srgbClr val="000000"/>
-              </a:solidFill>
-              <a:effectLst/>
-              <a:uFillTx/>
-              <a:latin typeface="Arial"/>
-            </a:endParaRPr>
-          </a:p>
-          <a:p>
-            <a:pPr marL="2160000" lvl="4" indent="-216000">
-              <a:lnSpc>
-                <a:spcPct val="100000"/>
-              </a:lnSpc>
-              <a:spcBef>
-                <a:spcPts val="283"/>
-              </a:spcBef>
-              <a:buClr>
-                <a:srgbClr val="000000"/>
-              </a:buClr>
-              <a:buSzPct val="45000"/>
-              <a:buFont typeface="Wingdings" charset="2"/>
-              <a:buChar char=""/>
-            </a:pPr>
-            <a:r>
-              <a:rPr lang="en-CA" sz="2000" b="0" u="none" strike="noStrike">
-                <a:solidFill>
-                  <a:srgbClr val="000000"/>
-                </a:solidFill>
-                <a:effectLst/>
-                <a:uFillTx/>
-                <a:latin typeface="Arial"/>
-              </a:rPr>
-              <a:t>Fifth Outline Level</a:t>
-            </a:r>
-            <a:endParaRPr lang="en-CA" sz="2000" b="0" u="none" strike="noStrike">
-              <a:solidFill>
-                <a:srgbClr val="000000"/>
-              </a:solidFill>
-              <a:effectLst/>
-              <a:uFillTx/>
-              <a:latin typeface="Arial"/>
-            </a:endParaRPr>
-          </a:p>
-          <a:p>
-            <a:pPr marL="2592000" lvl="5" indent="-216000">
-              <a:lnSpc>
-                <a:spcPct val="100000"/>
-              </a:lnSpc>
-              <a:spcBef>
-                <a:spcPts val="283"/>
-              </a:spcBef>
-              <a:buClr>
-                <a:srgbClr val="000000"/>
-              </a:buClr>
-              <a:buSzPct val="45000"/>
-              <a:buFont typeface="Wingdings" charset="2"/>
-              <a:buChar char=""/>
-            </a:pPr>
-            <a:r>
-              <a:rPr lang="en-CA" sz="2000" b="0" u="none" strike="noStrike">
-                <a:solidFill>
-                  <a:srgbClr val="000000"/>
-                </a:solidFill>
-                <a:effectLst/>
-                <a:uFillTx/>
-                <a:latin typeface="Arial"/>
-              </a:rPr>
-              <a:t>Sixth Outline Level</a:t>
-            </a:r>
-            <a:endParaRPr lang="en-CA" sz="2000" b="0" u="none" strike="noStrike">
-              <a:solidFill>
-                <a:srgbClr val="000000"/>
-              </a:solidFill>
-              <a:effectLst/>
-              <a:uFillTx/>
-              <a:latin typeface="Arial"/>
-            </a:endParaRPr>
-          </a:p>
-          <a:p>
-            <a:pPr marL="3024000" lvl="6" indent="-216000">
-              <a:lnSpc>
-                <a:spcPct val="100000"/>
-              </a:lnSpc>
-              <a:spcBef>
-                <a:spcPts val="283"/>
-              </a:spcBef>
-              <a:buClr>
-                <a:srgbClr val="000000"/>
-              </a:buClr>
-              <a:buSzPct val="45000"/>
-              <a:buFont typeface="Wingdings" charset="2"/>
-              <a:buChar char=""/>
-            </a:pPr>
-            <a:r>
-              <a:rPr lang="en-CA" sz="2000" b="0" u="none" strike="noStrike">
-                <a:solidFill>
-                  <a:srgbClr val="000000"/>
-                </a:solidFill>
-                <a:effectLst/>
-                <a:uFillTx/>
-                <a:latin typeface="Arial"/>
-              </a:rPr>
-              <a:t>Seventh Outline Level</a:t>
-            </a:r>
-            <a:endParaRPr lang="en-CA" sz="2000" b="0" u="none" strike="noStrike">
-              <a:solidFill>
-                <a:srgbClr val="000000"/>
-              </a:solidFill>
-              <a:effectLst/>
-              <a:uFillTx/>
-              <a:latin typeface="Arial"/>
-            </a:endParaRPr>
+        <p:spPr/>
+        <p:txBody>
+          <a:bodyPr/>
+          <a:p>
+            <a:r>
+              <a:rPr lang="en-CA"/>
+              <a:t/>
+            </a:r>
           </a:p>
         </p:txBody>
       </p:sp>
@@ -1208,12 +368,1171 @@
           <a:chExt cx="0" cy="0"/>
         </a:xfrm>
       </p:grpSpPr>
+      <p:sp>
+        <p:nvSpPr>
+          <p:cNvPr id="2" name="PlaceHolder 1"/>
+          <p:cNvSpPr>
+            <a:spLocks noGrp="1"/>
+          </p:cNvSpPr>
+          <p:nvPr>
+            <p:ph type="title"/>
+          </p:nvPr>
+        </p:nvSpPr>
+        <p:spPr>
+          <a:xfrm>
+            <a:off x="502920" y="820800"/>
+            <a:ext cx="9051120" cy="274680"/>
+          </a:xfrm>
+          <a:prstGeom prst="rect">
+            <a:avLst/>
+          </a:prstGeom>
+          <a:noFill/>
+          <a:ln w="0">
+            <a:noFill/>
+          </a:ln>
+        </p:spPr>
+        <p:txBody>
+          <a:bodyPr lIns="0" rIns="0" tIns="0" bIns="0" anchor="ctr">
+            <a:spAutoFit/>
+          </a:bodyPr>
+          <a:p>
+            <a:pPr indent="0">
+              <a:lnSpc>
+                <a:spcPct val="100000"/>
+              </a:lnSpc>
+              <a:buNone/>
+              <a:tabLst>
+                <a:tab algn="l" pos="0"/>
+              </a:tabLst>
+            </a:pPr>
+            <a:r>
+              <a:rPr lang="en-CA" sz="1800" b="0" u="none" strike="noStrike">
+                <a:solidFill>
+                  <a:srgbClr val="000000"/>
+                </a:solidFill>
+                <a:effectLst/>
+                <a:uFillTx/>
+                <a:latin typeface="Arial"/>
+              </a:rPr>
+              <a:t>Click to edit the title text format</a:t>
+            </a:r>
+            <a:endParaRPr lang="en-CA" sz="1800" b="0" u="none" strike="noStrike">
+              <a:solidFill>
+                <a:srgbClr val="000000"/>
+              </a:solidFill>
+              <a:effectLst/>
+              <a:uFillTx/>
+              <a:latin typeface="Arial"/>
+            </a:endParaRPr>
+          </a:p>
+        </p:txBody>
+      </p:sp>
+      <p:sp>
+        <p:nvSpPr>
+          <p:cNvPr id="3" name="PlaceHolder 2"/>
+          <p:cNvSpPr>
+            <a:spLocks noGrp="1"/>
+          </p:cNvSpPr>
+          <p:nvPr>
+            <p:ph type="body"/>
+          </p:nvPr>
+        </p:nvSpPr>
+        <p:spPr>
+          <a:xfrm>
+            <a:off x="502920" y="1818000"/>
+            <a:ext cx="9051120" cy="4506480"/>
+          </a:xfrm>
+          <a:prstGeom prst="rect">
+            <a:avLst/>
+          </a:prstGeom>
+          <a:noFill/>
+          <a:ln w="0">
+            <a:noFill/>
+          </a:ln>
+        </p:spPr>
+        <p:txBody>
+          <a:bodyPr lIns="0" rIns="0" tIns="0" bIns="0" anchor="t">
+            <a:normAutofit/>
+          </a:bodyPr>
+          <a:p>
+            <a:pPr marL="432000" indent="-324000">
+              <a:lnSpc>
+                <a:spcPct val="100000"/>
+              </a:lnSpc>
+              <a:spcBef>
+                <a:spcPts val="1417"/>
+              </a:spcBef>
+              <a:buClr>
+                <a:srgbClr val="000000"/>
+              </a:buClr>
+              <a:buSzPct val="45000"/>
+              <a:buFont typeface="Wingdings" charset="2"/>
+              <a:buChar char=""/>
+            </a:pPr>
+            <a:r>
+              <a:rPr lang="en-CA" sz="1800" b="0" u="none" strike="noStrike">
+                <a:solidFill>
+                  <a:srgbClr val="000000"/>
+                </a:solidFill>
+                <a:effectLst/>
+                <a:uFillTx/>
+                <a:latin typeface="Arial"/>
+              </a:rPr>
+              <a:t>Click to edit the outline text format</a:t>
+            </a:r>
+            <a:endParaRPr lang="en-CA" sz="1800" b="0" u="none" strike="noStrike">
+              <a:solidFill>
+                <a:srgbClr val="000000"/>
+              </a:solidFill>
+              <a:effectLst/>
+              <a:uFillTx/>
+              <a:latin typeface="Arial"/>
+            </a:endParaRPr>
+          </a:p>
+          <a:p>
+            <a:pPr marL="864000" lvl="1" indent="-324000">
+              <a:lnSpc>
+                <a:spcPct val="100000"/>
+              </a:lnSpc>
+              <a:spcBef>
+                <a:spcPts val="1134"/>
+              </a:spcBef>
+              <a:buClr>
+                <a:srgbClr val="000000"/>
+              </a:buClr>
+              <a:buSzPct val="75000"/>
+              <a:buFont typeface="Symbol" charset="2"/>
+              <a:buChar char=""/>
+            </a:pPr>
+            <a:r>
+              <a:rPr lang="en-CA" sz="1800" b="0" u="none" strike="noStrike">
+                <a:solidFill>
+                  <a:srgbClr val="000000"/>
+                </a:solidFill>
+                <a:effectLst/>
+                <a:uFillTx/>
+                <a:latin typeface="Arial"/>
+              </a:rPr>
+              <a:t>Second Outline Level</a:t>
+            </a:r>
+            <a:endParaRPr lang="en-CA" sz="1800" b="0" u="none" strike="noStrike">
+              <a:solidFill>
+                <a:srgbClr val="000000"/>
+              </a:solidFill>
+              <a:effectLst/>
+              <a:uFillTx/>
+              <a:latin typeface="Arial"/>
+            </a:endParaRPr>
+          </a:p>
+          <a:p>
+            <a:pPr marL="1296000" lvl="2" indent="-288000">
+              <a:lnSpc>
+                <a:spcPct val="100000"/>
+              </a:lnSpc>
+              <a:spcBef>
+                <a:spcPts val="850"/>
+              </a:spcBef>
+              <a:buClr>
+                <a:srgbClr val="000000"/>
+              </a:buClr>
+              <a:buSzPct val="45000"/>
+              <a:buFont typeface="Wingdings" charset="2"/>
+              <a:buChar char=""/>
+            </a:pPr>
+            <a:r>
+              <a:rPr lang="en-CA" sz="1800" b="0" u="none" strike="noStrike">
+                <a:solidFill>
+                  <a:srgbClr val="000000"/>
+                </a:solidFill>
+                <a:effectLst/>
+                <a:uFillTx/>
+                <a:latin typeface="Arial"/>
+              </a:rPr>
+              <a:t>Third Outline Level</a:t>
+            </a:r>
+            <a:endParaRPr lang="en-CA" sz="1800" b="0" u="none" strike="noStrike">
+              <a:solidFill>
+                <a:srgbClr val="000000"/>
+              </a:solidFill>
+              <a:effectLst/>
+              <a:uFillTx/>
+              <a:latin typeface="Arial"/>
+            </a:endParaRPr>
+          </a:p>
+          <a:p>
+            <a:pPr marL="1728000" lvl="3" indent="-216000">
+              <a:lnSpc>
+                <a:spcPct val="100000"/>
+              </a:lnSpc>
+              <a:spcBef>
+                <a:spcPts val="567"/>
+              </a:spcBef>
+              <a:buClr>
+                <a:srgbClr val="000000"/>
+              </a:buClr>
+              <a:buSzPct val="75000"/>
+              <a:buFont typeface="Symbol" charset="2"/>
+              <a:buChar char=""/>
+            </a:pPr>
+            <a:r>
+              <a:rPr lang="en-CA" sz="1800" b="0" u="none" strike="noStrike">
+                <a:solidFill>
+                  <a:srgbClr val="000000"/>
+                </a:solidFill>
+                <a:effectLst/>
+                <a:uFillTx/>
+                <a:latin typeface="Arial"/>
+              </a:rPr>
+              <a:t>Fourth Outline Level</a:t>
+            </a:r>
+            <a:endParaRPr lang="en-CA" sz="1800" b="0" u="none" strike="noStrike">
+              <a:solidFill>
+                <a:srgbClr val="000000"/>
+              </a:solidFill>
+              <a:effectLst/>
+              <a:uFillTx/>
+              <a:latin typeface="Arial"/>
+            </a:endParaRPr>
+          </a:p>
+          <a:p>
+            <a:pPr marL="2160000" lvl="4" indent="-216000">
+              <a:lnSpc>
+                <a:spcPct val="100000"/>
+              </a:lnSpc>
+              <a:spcBef>
+                <a:spcPts val="283"/>
+              </a:spcBef>
+              <a:buClr>
+                <a:srgbClr val="000000"/>
+              </a:buClr>
+              <a:buSzPct val="45000"/>
+              <a:buFont typeface="Wingdings" charset="2"/>
+              <a:buChar char=""/>
+            </a:pPr>
+            <a:r>
+              <a:rPr lang="en-CA" sz="1800" b="0" u="none" strike="noStrike">
+                <a:solidFill>
+                  <a:srgbClr val="000000"/>
+                </a:solidFill>
+                <a:effectLst/>
+                <a:uFillTx/>
+                <a:latin typeface="Arial"/>
+              </a:rPr>
+              <a:t>Fifth Outline Level</a:t>
+            </a:r>
+            <a:endParaRPr lang="en-CA" sz="1800" b="0" u="none" strike="noStrike">
+              <a:solidFill>
+                <a:srgbClr val="000000"/>
+              </a:solidFill>
+              <a:effectLst/>
+              <a:uFillTx/>
+              <a:latin typeface="Arial"/>
+            </a:endParaRPr>
+          </a:p>
+          <a:p>
+            <a:pPr marL="2592000" lvl="5" indent="-216000">
+              <a:lnSpc>
+                <a:spcPct val="100000"/>
+              </a:lnSpc>
+              <a:spcBef>
+                <a:spcPts val="283"/>
+              </a:spcBef>
+              <a:buClr>
+                <a:srgbClr val="000000"/>
+              </a:buClr>
+              <a:buSzPct val="45000"/>
+              <a:buFont typeface="Wingdings" charset="2"/>
+              <a:buChar char=""/>
+            </a:pPr>
+            <a:r>
+              <a:rPr lang="en-CA" sz="1800" b="0" u="none" strike="noStrike">
+                <a:solidFill>
+                  <a:srgbClr val="000000"/>
+                </a:solidFill>
+                <a:effectLst/>
+                <a:uFillTx/>
+                <a:latin typeface="Arial"/>
+              </a:rPr>
+              <a:t>Sixth Outline Level</a:t>
+            </a:r>
+            <a:endParaRPr lang="en-CA" sz="1800" b="0" u="none" strike="noStrike">
+              <a:solidFill>
+                <a:srgbClr val="000000"/>
+              </a:solidFill>
+              <a:effectLst/>
+              <a:uFillTx/>
+              <a:latin typeface="Arial"/>
+            </a:endParaRPr>
+          </a:p>
+          <a:p>
+            <a:pPr marL="3024000" lvl="6" indent="-216000">
+              <a:lnSpc>
+                <a:spcPct val="100000"/>
+              </a:lnSpc>
+              <a:spcBef>
+                <a:spcPts val="283"/>
+              </a:spcBef>
+              <a:buClr>
+                <a:srgbClr val="000000"/>
+              </a:buClr>
+              <a:buSzPct val="45000"/>
+              <a:buFont typeface="Wingdings" charset="2"/>
+              <a:buChar char=""/>
+            </a:pPr>
+            <a:r>
+              <a:rPr lang="en-CA" sz="1800" b="0" u="none" strike="noStrike">
+                <a:solidFill>
+                  <a:srgbClr val="000000"/>
+                </a:solidFill>
+                <a:effectLst/>
+                <a:uFillTx/>
+                <a:latin typeface="Arial"/>
+              </a:rPr>
+              <a:t>Seventh Outline Level</a:t>
+            </a:r>
+            <a:endParaRPr lang="en-CA" sz="1800" b="0" u="none" strike="noStrike">
+              <a:solidFill>
+                <a:srgbClr val="000000"/>
+              </a:solidFill>
+              <a:effectLst/>
+              <a:uFillTx/>
+              <a:latin typeface="Arial"/>
+            </a:endParaRPr>
+          </a:p>
+        </p:txBody>
+      </p:sp>
+      <p:sp>
+        <p:nvSpPr>
+          <p:cNvPr id="4" name="PlaceHolder 3"/>
+          <p:cNvSpPr>
+            <a:spLocks noGrp="1"/>
+          </p:cNvSpPr>
+          <p:nvPr>
+            <p:ph type="ftr" idx="1"/>
+          </p:nvPr>
+        </p:nvSpPr>
+        <p:spPr>
+          <a:xfrm>
+            <a:off x="3439440" y="7080120"/>
+            <a:ext cx="3187080" cy="534600"/>
+          </a:xfrm>
+          <a:prstGeom prst="rect">
+            <a:avLst/>
+          </a:prstGeom>
+          <a:noFill/>
+          <a:ln w="0">
+            <a:noFill/>
+          </a:ln>
+        </p:spPr>
+        <p:txBody>
+          <a:bodyPr lIns="0" rIns="0" tIns="0" bIns="0" anchor="t">
+            <a:noAutofit/>
+          </a:bodyPr>
+          <a:lstStyle>
+            <a:lvl1pPr indent="0" algn="ctr">
+              <a:lnSpc>
+                <a:spcPct val="100000"/>
+              </a:lnSpc>
+              <a:buNone/>
+              <a:tabLst>
+                <a:tab algn="l" pos="0"/>
+              </a:tabLst>
+              <a:defRPr lang="en-CA" sz="1400" b="0" u="none" strike="noStrike">
+                <a:solidFill>
+                  <a:srgbClr val="000000"/>
+                </a:solidFill>
+                <a:effectLst/>
+                <a:uFillTx/>
+                <a:latin typeface="Times New Roman"/>
+              </a:defRPr>
+            </a:lvl1pPr>
+          </a:lstStyle>
+          <a:p>
+            <a:pPr indent="0" algn="ctr">
+              <a:lnSpc>
+                <a:spcPct val="100000"/>
+              </a:lnSpc>
+              <a:buNone/>
+              <a:tabLst>
+                <a:tab algn="l" pos="0"/>
+              </a:tabLst>
+            </a:pPr>
+            <a:r>
+              <a:rPr lang="en-CA" sz="1400" b="0" u="none" strike="noStrike">
+                <a:solidFill>
+                  <a:srgbClr val="000000"/>
+                </a:solidFill>
+                <a:effectLst/>
+                <a:uFillTx/>
+                <a:latin typeface="Times New Roman"/>
+              </a:rPr>
+              <a:t>&lt;footer&gt;</a:t>
+            </a:r>
+            <a:endParaRPr lang="en-CA" sz="1400" b="0" u="none" strike="noStrike">
+              <a:solidFill>
+                <a:srgbClr val="000000"/>
+              </a:solidFill>
+              <a:effectLst/>
+              <a:uFillTx/>
+              <a:latin typeface="Times New Roman"/>
+            </a:endParaRPr>
+          </a:p>
+        </p:txBody>
+      </p:sp>
+      <p:sp>
+        <p:nvSpPr>
+          <p:cNvPr id="5" name="PlaceHolder 4"/>
+          <p:cNvSpPr>
+            <a:spLocks noGrp="1"/>
+          </p:cNvSpPr>
+          <p:nvPr>
+            <p:ph type="sldNum" idx="2"/>
+          </p:nvPr>
+        </p:nvSpPr>
+        <p:spPr>
+          <a:xfrm>
+            <a:off x="7211160" y="7080120"/>
+            <a:ext cx="2342160" cy="534600"/>
+          </a:xfrm>
+          <a:prstGeom prst="rect">
+            <a:avLst/>
+          </a:prstGeom>
+          <a:noFill/>
+          <a:ln w="0">
+            <a:noFill/>
+          </a:ln>
+        </p:spPr>
+        <p:txBody>
+          <a:bodyPr lIns="0" rIns="0" tIns="0" bIns="0" anchor="t">
+            <a:noAutofit/>
+          </a:bodyPr>
+          <a:lstStyle>
+            <a:lvl1pPr indent="0" algn="r">
+              <a:lnSpc>
+                <a:spcPct val="100000"/>
+              </a:lnSpc>
+              <a:buNone/>
+              <a:tabLst>
+                <a:tab algn="l" pos="0"/>
+              </a:tabLst>
+              <a:defRPr lang="en-CA" sz="1400" b="0" u="none" strike="noStrike">
+                <a:solidFill>
+                  <a:srgbClr val="000000"/>
+                </a:solidFill>
+                <a:effectLst/>
+                <a:uFillTx/>
+                <a:latin typeface="Times New Roman"/>
+              </a:defRPr>
+            </a:lvl1pPr>
+          </a:lstStyle>
+          <a:p>
+            <a:pPr indent="0" algn="r">
+              <a:lnSpc>
+                <a:spcPct val="100000"/>
+              </a:lnSpc>
+              <a:buNone/>
+              <a:tabLst>
+                <a:tab algn="l" pos="0"/>
+              </a:tabLst>
+            </a:pPr>
+            <a:fld id="{725C0072-4290-4F4A-A607-E6CC915DDF92}" type="slidenum">
+              <a:rPr lang="en-CA" sz="1400" b="0" u="none" strike="noStrike">
+                <a:solidFill>
+                  <a:srgbClr val="000000"/>
+                </a:solidFill>
+                <a:effectLst/>
+                <a:uFillTx/>
+                <a:latin typeface="Times New Roman"/>
+              </a:rPr>
+              <a:t>&lt;number&gt;</a:t>
+            </a:fld>
+            <a:endParaRPr lang="en-CA" sz="1400" b="0" u="none" strike="noStrike">
+              <a:solidFill>
+                <a:srgbClr val="000000"/>
+              </a:solidFill>
+              <a:effectLst/>
+              <a:uFillTx/>
+              <a:latin typeface="Times New Roman"/>
+            </a:endParaRPr>
+          </a:p>
+        </p:txBody>
+      </p:sp>
+      <p:sp>
+        <p:nvSpPr>
+          <p:cNvPr id="6" name="PlaceHolder 5"/>
+          <p:cNvSpPr>
+            <a:spLocks noGrp="1"/>
+          </p:cNvSpPr>
+          <p:nvPr>
+            <p:ph type="dt" idx="3"/>
+          </p:nvPr>
+        </p:nvSpPr>
+        <p:spPr>
+          <a:xfrm>
+            <a:off x="502920" y="7080120"/>
+            <a:ext cx="2342160" cy="534600"/>
+          </a:xfrm>
+          <a:prstGeom prst="rect">
+            <a:avLst/>
+          </a:prstGeom>
+          <a:noFill/>
+          <a:ln w="0">
+            <a:noFill/>
+          </a:ln>
+        </p:spPr>
+        <p:txBody>
+          <a:bodyPr lIns="0" rIns="0" tIns="0" bIns="0" anchor="t">
+            <a:noAutofit/>
+          </a:bodyPr>
+          <a:lstStyle>
+            <a:lvl1pPr indent="0">
+              <a:lnSpc>
+                <a:spcPct val="100000"/>
+              </a:lnSpc>
+              <a:buNone/>
+              <a:tabLst>
+                <a:tab algn="l" pos="0"/>
+              </a:tabLst>
+              <a:defRPr lang="en-CA" sz="1400" b="0" u="none" strike="noStrike">
+                <a:solidFill>
+                  <a:srgbClr val="000000"/>
+                </a:solidFill>
+                <a:effectLst/>
+                <a:uFillTx/>
+                <a:latin typeface="Times New Roman"/>
+              </a:defRPr>
+            </a:lvl1pPr>
+          </a:lstStyle>
+          <a:p>
+            <a:pPr indent="0">
+              <a:lnSpc>
+                <a:spcPct val="100000"/>
+              </a:lnSpc>
+              <a:buNone/>
+              <a:tabLst>
+                <a:tab algn="l" pos="0"/>
+              </a:tabLst>
+            </a:pPr>
+            <a:r>
+              <a:rPr lang="en-CA" sz="1400" b="0" u="none" strike="noStrike">
+                <a:solidFill>
+                  <a:srgbClr val="000000"/>
+                </a:solidFill>
+                <a:effectLst/>
+                <a:uFillTx/>
+                <a:latin typeface="Times New Roman"/>
+              </a:rPr>
+              <a:t>&lt;date/time&gt;</a:t>
+            </a:r>
+            <a:endParaRPr lang="en-CA" sz="1400" b="0" u="none" strike="noStrike">
+              <a:solidFill>
+                <a:srgbClr val="000000"/>
+              </a:solidFill>
+              <a:effectLst/>
+              <a:uFillTx/>
+              <a:latin typeface="Times New Roman"/>
+            </a:endParaRPr>
+          </a:p>
+        </p:txBody>
+      </p:sp>
     </p:spTree>
   </p:cSld>
   <p:clrMap bg1="lt1" tx1="dk1" bg2="lt2" tx2="dk2" accent1="accent1" accent2="accent2" accent3="accent3" accent4="accent4" accent5="accent5" accent6="accent6" hlink="hlink" folHlink="folHlink"/>
   <p:sldLayoutIdLst>
     <p:sldLayoutId id="2147483649" r:id="rId2"/>
-    <p:sldLayoutId id="2147483650" r:id="rId3"/>
+  </p:sldLayoutIdLst>
+</p:sldMaster>
+</file>
+
+<file path=ppt/slideMasters/slideMaster2.xml><?xml version="1.0" encoding="utf-8"?>
+<p:sldMaster xmlns:a="http://schemas.openxmlformats.org/drawingml/2006/main" xmlns:p="http://schemas.openxmlformats.org/presentationml/2006/main" xmlns:r="http://schemas.openxmlformats.org/officeDocument/2006/relationships" xmlns:p14="http://schemas.microsoft.com/office/powerpoint/2010/main" xmlns:p15="http://schemas.microsoft.com/office/powerpoint/2012/main" xmlns:mc="http://schemas.openxmlformats.org/markup-compatibility/2006">
+  <p:cSld>
+    <p:spTree>
+      <p:nvGrpSpPr>
+        <p:cNvPr id="1" name=""/>
+        <p:cNvGrpSpPr/>
+        <p:nvPr/>
+      </p:nvGrpSpPr>
+      <p:grpSpPr>
+        <a:xfrm>
+          <a:off x="0" y="0"/>
+          <a:ext cx="0" cy="0"/>
+          <a:chOff x="0" y="0"/>
+          <a:chExt cx="0" cy="0"/>
+        </a:xfrm>
+      </p:grpSpPr>
+      <p:sp>
+        <p:nvSpPr>
+          <p:cNvPr id="9" name="PlaceHolder 1"/>
+          <p:cNvSpPr>
+            <a:spLocks noGrp="1"/>
+          </p:cNvSpPr>
+          <p:nvPr>
+            <p:ph type="title"/>
+          </p:nvPr>
+        </p:nvSpPr>
+        <p:spPr>
+          <a:xfrm>
+            <a:off x="502920" y="820800"/>
+            <a:ext cx="9051120" cy="274680"/>
+          </a:xfrm>
+          <a:prstGeom prst="rect">
+            <a:avLst/>
+          </a:prstGeom>
+          <a:noFill/>
+          <a:ln w="0">
+            <a:noFill/>
+          </a:ln>
+        </p:spPr>
+        <p:txBody>
+          <a:bodyPr lIns="0" rIns="0" tIns="0" bIns="0" anchor="ctr">
+            <a:spAutoFit/>
+          </a:bodyPr>
+          <a:p>
+            <a:pPr indent="0">
+              <a:lnSpc>
+                <a:spcPct val="100000"/>
+              </a:lnSpc>
+              <a:buNone/>
+              <a:tabLst>
+                <a:tab algn="l" pos="0"/>
+              </a:tabLst>
+            </a:pPr>
+            <a:r>
+              <a:rPr lang="en-CA" sz="1800" b="0" u="none" strike="noStrike">
+                <a:solidFill>
+                  <a:srgbClr val="000000"/>
+                </a:solidFill>
+                <a:effectLst/>
+                <a:uFillTx/>
+                <a:latin typeface="Arial"/>
+              </a:rPr>
+              <a:t>Click to edit the title text format</a:t>
+            </a:r>
+            <a:endParaRPr lang="en-CA" sz="1800" b="0" u="none" strike="noStrike">
+              <a:solidFill>
+                <a:srgbClr val="000000"/>
+              </a:solidFill>
+              <a:effectLst/>
+              <a:uFillTx/>
+              <a:latin typeface="Arial"/>
+            </a:endParaRPr>
+          </a:p>
+        </p:txBody>
+      </p:sp>
+      <p:sp>
+        <p:nvSpPr>
+          <p:cNvPr id="10" name="PlaceHolder 2"/>
+          <p:cNvSpPr>
+            <a:spLocks noGrp="1"/>
+          </p:cNvSpPr>
+          <p:nvPr>
+            <p:ph type="ftr" idx="4"/>
+          </p:nvPr>
+        </p:nvSpPr>
+        <p:spPr>
+          <a:xfrm>
+            <a:off x="3439440" y="7080120"/>
+            <a:ext cx="3187080" cy="534600"/>
+          </a:xfrm>
+          <a:prstGeom prst="rect">
+            <a:avLst/>
+          </a:prstGeom>
+          <a:noFill/>
+          <a:ln w="0">
+            <a:noFill/>
+          </a:ln>
+        </p:spPr>
+        <p:txBody>
+          <a:bodyPr lIns="0" rIns="0" tIns="0" bIns="0" anchor="t">
+            <a:noAutofit/>
+          </a:bodyPr>
+          <a:lstStyle>
+            <a:lvl1pPr indent="0" algn="ctr">
+              <a:lnSpc>
+                <a:spcPct val="100000"/>
+              </a:lnSpc>
+              <a:buNone/>
+              <a:tabLst>
+                <a:tab algn="l" pos="0"/>
+              </a:tabLst>
+              <a:defRPr lang="en-CA" sz="1400" b="0" u="none" strike="noStrike">
+                <a:solidFill>
+                  <a:srgbClr val="000000"/>
+                </a:solidFill>
+                <a:effectLst/>
+                <a:uFillTx/>
+                <a:latin typeface="Times New Roman"/>
+              </a:defRPr>
+            </a:lvl1pPr>
+          </a:lstStyle>
+          <a:p>
+            <a:pPr indent="0" algn="ctr">
+              <a:lnSpc>
+                <a:spcPct val="100000"/>
+              </a:lnSpc>
+              <a:buNone/>
+              <a:tabLst>
+                <a:tab algn="l" pos="0"/>
+              </a:tabLst>
+            </a:pPr>
+            <a:r>
+              <a:rPr lang="en-CA" sz="1400" b="0" u="none" strike="noStrike">
+                <a:solidFill>
+                  <a:srgbClr val="000000"/>
+                </a:solidFill>
+                <a:effectLst/>
+                <a:uFillTx/>
+                <a:latin typeface="Times New Roman"/>
+              </a:rPr>
+              <a:t>&lt;footer&gt;</a:t>
+            </a:r>
+            <a:endParaRPr lang="en-CA" sz="1400" b="0" u="none" strike="noStrike">
+              <a:solidFill>
+                <a:srgbClr val="000000"/>
+              </a:solidFill>
+              <a:effectLst/>
+              <a:uFillTx/>
+              <a:latin typeface="Times New Roman"/>
+            </a:endParaRPr>
+          </a:p>
+        </p:txBody>
+      </p:sp>
+      <p:sp>
+        <p:nvSpPr>
+          <p:cNvPr id="11" name="PlaceHolder 3"/>
+          <p:cNvSpPr>
+            <a:spLocks noGrp="1"/>
+          </p:cNvSpPr>
+          <p:nvPr>
+            <p:ph type="sldNum" idx="5"/>
+          </p:nvPr>
+        </p:nvSpPr>
+        <p:spPr>
+          <a:xfrm>
+            <a:off x="7211160" y="7080120"/>
+            <a:ext cx="2342160" cy="534600"/>
+          </a:xfrm>
+          <a:prstGeom prst="rect">
+            <a:avLst/>
+          </a:prstGeom>
+          <a:noFill/>
+          <a:ln w="0">
+            <a:noFill/>
+          </a:ln>
+        </p:spPr>
+        <p:txBody>
+          <a:bodyPr lIns="0" rIns="0" tIns="0" bIns="0" anchor="t">
+            <a:noAutofit/>
+          </a:bodyPr>
+          <a:lstStyle>
+            <a:lvl1pPr indent="0" algn="r">
+              <a:lnSpc>
+                <a:spcPct val="100000"/>
+              </a:lnSpc>
+              <a:buNone/>
+              <a:tabLst>
+                <a:tab algn="l" pos="0"/>
+              </a:tabLst>
+              <a:defRPr lang="en-CA" sz="1400" b="0" u="none" strike="noStrike">
+                <a:solidFill>
+                  <a:srgbClr val="000000"/>
+                </a:solidFill>
+                <a:effectLst/>
+                <a:uFillTx/>
+                <a:latin typeface="Times New Roman"/>
+              </a:defRPr>
+            </a:lvl1pPr>
+          </a:lstStyle>
+          <a:p>
+            <a:pPr indent="0" algn="r">
+              <a:lnSpc>
+                <a:spcPct val="100000"/>
+              </a:lnSpc>
+              <a:buNone/>
+              <a:tabLst>
+                <a:tab algn="l" pos="0"/>
+              </a:tabLst>
+            </a:pPr>
+            <a:fld id="{FA9C466F-1CF8-419A-B142-E045883E98DD}" type="slidenum">
+              <a:rPr lang="en-CA" sz="1400" b="0" u="none" strike="noStrike">
+                <a:solidFill>
+                  <a:srgbClr val="000000"/>
+                </a:solidFill>
+                <a:effectLst/>
+                <a:uFillTx/>
+                <a:latin typeface="Times New Roman"/>
+              </a:rPr>
+              <a:t>&lt;number&gt;</a:t>
+            </a:fld>
+            <a:endParaRPr lang="en-CA" sz="1400" b="0" u="none" strike="noStrike">
+              <a:solidFill>
+                <a:srgbClr val="000000"/>
+              </a:solidFill>
+              <a:effectLst/>
+              <a:uFillTx/>
+              <a:latin typeface="Times New Roman"/>
+            </a:endParaRPr>
+          </a:p>
+        </p:txBody>
+      </p:sp>
+      <p:sp>
+        <p:nvSpPr>
+          <p:cNvPr id="12" name="PlaceHolder 4"/>
+          <p:cNvSpPr>
+            <a:spLocks noGrp="1"/>
+          </p:cNvSpPr>
+          <p:nvPr>
+            <p:ph type="dt" idx="6"/>
+          </p:nvPr>
+        </p:nvSpPr>
+        <p:spPr>
+          <a:xfrm>
+            <a:off x="502920" y="7080120"/>
+            <a:ext cx="2342160" cy="534600"/>
+          </a:xfrm>
+          <a:prstGeom prst="rect">
+            <a:avLst/>
+          </a:prstGeom>
+          <a:noFill/>
+          <a:ln w="0">
+            <a:noFill/>
+          </a:ln>
+        </p:spPr>
+        <p:txBody>
+          <a:bodyPr lIns="0" rIns="0" tIns="0" bIns="0" anchor="t">
+            <a:noAutofit/>
+          </a:bodyPr>
+          <a:lstStyle>
+            <a:lvl1pPr indent="0">
+              <a:lnSpc>
+                <a:spcPct val="100000"/>
+              </a:lnSpc>
+              <a:buNone/>
+              <a:tabLst>
+                <a:tab algn="l" pos="0"/>
+              </a:tabLst>
+              <a:defRPr lang="en-CA" sz="1400" b="0" u="none" strike="noStrike">
+                <a:solidFill>
+                  <a:srgbClr val="000000"/>
+                </a:solidFill>
+                <a:effectLst/>
+                <a:uFillTx/>
+                <a:latin typeface="Times New Roman"/>
+              </a:defRPr>
+            </a:lvl1pPr>
+          </a:lstStyle>
+          <a:p>
+            <a:pPr indent="0">
+              <a:lnSpc>
+                <a:spcPct val="100000"/>
+              </a:lnSpc>
+              <a:buNone/>
+              <a:tabLst>
+                <a:tab algn="l" pos="0"/>
+              </a:tabLst>
+            </a:pPr>
+            <a:r>
+              <a:rPr lang="en-CA" sz="1400" b="0" u="none" strike="noStrike">
+                <a:solidFill>
+                  <a:srgbClr val="000000"/>
+                </a:solidFill>
+                <a:effectLst/>
+                <a:uFillTx/>
+                <a:latin typeface="Times New Roman"/>
+              </a:rPr>
+              <a:t>&lt;date/time&gt;</a:t>
+            </a:r>
+            <a:endParaRPr lang="en-CA" sz="1400" b="0" u="none" strike="noStrike">
+              <a:solidFill>
+                <a:srgbClr val="000000"/>
+              </a:solidFill>
+              <a:effectLst/>
+              <a:uFillTx/>
+              <a:latin typeface="Times New Roman"/>
+            </a:endParaRPr>
+          </a:p>
+        </p:txBody>
+      </p:sp>
+      <p:sp>
+        <p:nvSpPr>
+          <p:cNvPr id="13" name="PlaceHolder 5"/>
+          <p:cNvSpPr>
+            <a:spLocks noGrp="1"/>
+          </p:cNvSpPr>
+          <p:nvPr>
+            <p:ph type="body"/>
+          </p:nvPr>
+        </p:nvSpPr>
+        <p:spPr>
+          <a:xfrm>
+            <a:off x="502920" y="1818720"/>
+            <a:ext cx="9051480" cy="4506840"/>
+          </a:xfrm>
+          <a:prstGeom prst="rect">
+            <a:avLst/>
+          </a:prstGeom>
+          <a:noFill/>
+          <a:ln w="0">
+            <a:noFill/>
+          </a:ln>
+        </p:spPr>
+        <p:txBody>
+          <a:bodyPr lIns="0" rIns="0" tIns="0" bIns="0" anchor="t">
+            <a:normAutofit/>
+          </a:bodyPr>
+          <a:p>
+            <a:pPr marL="432000" indent="-324000">
+              <a:lnSpc>
+                <a:spcPct val="100000"/>
+              </a:lnSpc>
+              <a:spcBef>
+                <a:spcPts val="1417"/>
+              </a:spcBef>
+              <a:buClr>
+                <a:srgbClr val="000000"/>
+              </a:buClr>
+              <a:buSzPct val="45000"/>
+              <a:buFont typeface="Wingdings" charset="2"/>
+              <a:buChar char=""/>
+            </a:pPr>
+            <a:r>
+              <a:rPr lang="en-CA" sz="3200" b="0" u="none" strike="noStrike">
+                <a:solidFill>
+                  <a:srgbClr val="000000"/>
+                </a:solidFill>
+                <a:effectLst/>
+                <a:uFillTx/>
+                <a:latin typeface="Arial"/>
+              </a:rPr>
+              <a:t>Click to edit the outline text format</a:t>
+            </a:r>
+            <a:endParaRPr lang="en-CA" sz="3200" b="0" u="none" strike="noStrike">
+              <a:solidFill>
+                <a:srgbClr val="000000"/>
+              </a:solidFill>
+              <a:effectLst/>
+              <a:uFillTx/>
+              <a:latin typeface="Arial"/>
+            </a:endParaRPr>
+          </a:p>
+          <a:p>
+            <a:pPr marL="864000" lvl="1" indent="-324000">
+              <a:lnSpc>
+                <a:spcPct val="100000"/>
+              </a:lnSpc>
+              <a:spcBef>
+                <a:spcPts val="1134"/>
+              </a:spcBef>
+              <a:buClr>
+                <a:srgbClr val="000000"/>
+              </a:buClr>
+              <a:buSzPct val="75000"/>
+              <a:buFont typeface="Symbol" charset="2"/>
+              <a:buChar char=""/>
+            </a:pPr>
+            <a:r>
+              <a:rPr lang="en-CA" sz="2800" b="0" u="none" strike="noStrike">
+                <a:solidFill>
+                  <a:srgbClr val="000000"/>
+                </a:solidFill>
+                <a:effectLst/>
+                <a:uFillTx/>
+                <a:latin typeface="Arial"/>
+              </a:rPr>
+              <a:t>Second Outline Level</a:t>
+            </a:r>
+            <a:endParaRPr lang="en-CA" sz="2800" b="0" u="none" strike="noStrike">
+              <a:solidFill>
+                <a:srgbClr val="000000"/>
+              </a:solidFill>
+              <a:effectLst/>
+              <a:uFillTx/>
+              <a:latin typeface="Arial"/>
+            </a:endParaRPr>
+          </a:p>
+          <a:p>
+            <a:pPr marL="1296000" lvl="2" indent="-288000">
+              <a:lnSpc>
+                <a:spcPct val="100000"/>
+              </a:lnSpc>
+              <a:spcBef>
+                <a:spcPts val="850"/>
+              </a:spcBef>
+              <a:buClr>
+                <a:srgbClr val="000000"/>
+              </a:buClr>
+              <a:buSzPct val="45000"/>
+              <a:buFont typeface="Wingdings" charset="2"/>
+              <a:buChar char=""/>
+            </a:pPr>
+            <a:r>
+              <a:rPr lang="en-CA" sz="2400" b="0" u="none" strike="noStrike">
+                <a:solidFill>
+                  <a:srgbClr val="000000"/>
+                </a:solidFill>
+                <a:effectLst/>
+                <a:uFillTx/>
+                <a:latin typeface="Arial"/>
+              </a:rPr>
+              <a:t>Third Outline Level</a:t>
+            </a:r>
+            <a:endParaRPr lang="en-CA" sz="2400" b="0" u="none" strike="noStrike">
+              <a:solidFill>
+                <a:srgbClr val="000000"/>
+              </a:solidFill>
+              <a:effectLst/>
+              <a:uFillTx/>
+              <a:latin typeface="Arial"/>
+            </a:endParaRPr>
+          </a:p>
+          <a:p>
+            <a:pPr marL="1728000" lvl="3" indent="-216000">
+              <a:lnSpc>
+                <a:spcPct val="100000"/>
+              </a:lnSpc>
+              <a:spcBef>
+                <a:spcPts val="567"/>
+              </a:spcBef>
+              <a:buClr>
+                <a:srgbClr val="000000"/>
+              </a:buClr>
+              <a:buSzPct val="75000"/>
+              <a:buFont typeface="Symbol" charset="2"/>
+              <a:buChar char=""/>
+            </a:pPr>
+            <a:r>
+              <a:rPr lang="en-CA" sz="2000" b="0" u="none" strike="noStrike">
+                <a:solidFill>
+                  <a:srgbClr val="000000"/>
+                </a:solidFill>
+                <a:effectLst/>
+                <a:uFillTx/>
+                <a:latin typeface="Arial"/>
+              </a:rPr>
+              <a:t>Fourth Outline Level</a:t>
+            </a:r>
+            <a:endParaRPr lang="en-CA" sz="2000" b="0" u="none" strike="noStrike">
+              <a:solidFill>
+                <a:srgbClr val="000000"/>
+              </a:solidFill>
+              <a:effectLst/>
+              <a:uFillTx/>
+              <a:latin typeface="Arial"/>
+            </a:endParaRPr>
+          </a:p>
+          <a:p>
+            <a:pPr marL="2160000" lvl="4" indent="-216000">
+              <a:lnSpc>
+                <a:spcPct val="100000"/>
+              </a:lnSpc>
+              <a:spcBef>
+                <a:spcPts val="283"/>
+              </a:spcBef>
+              <a:buClr>
+                <a:srgbClr val="000000"/>
+              </a:buClr>
+              <a:buSzPct val="45000"/>
+              <a:buFont typeface="Wingdings" charset="2"/>
+              <a:buChar char=""/>
+            </a:pPr>
+            <a:r>
+              <a:rPr lang="en-CA" sz="2000" b="0" u="none" strike="noStrike">
+                <a:solidFill>
+                  <a:srgbClr val="000000"/>
+                </a:solidFill>
+                <a:effectLst/>
+                <a:uFillTx/>
+                <a:latin typeface="Arial"/>
+              </a:rPr>
+              <a:t>Fifth Outline Level</a:t>
+            </a:r>
+            <a:endParaRPr lang="en-CA" sz="2000" b="0" u="none" strike="noStrike">
+              <a:solidFill>
+                <a:srgbClr val="000000"/>
+              </a:solidFill>
+              <a:effectLst/>
+              <a:uFillTx/>
+              <a:latin typeface="Arial"/>
+            </a:endParaRPr>
+          </a:p>
+          <a:p>
+            <a:pPr marL="2592000" lvl="5" indent="-216000">
+              <a:lnSpc>
+                <a:spcPct val="100000"/>
+              </a:lnSpc>
+              <a:spcBef>
+                <a:spcPts val="283"/>
+              </a:spcBef>
+              <a:buClr>
+                <a:srgbClr val="000000"/>
+              </a:buClr>
+              <a:buSzPct val="45000"/>
+              <a:buFont typeface="Wingdings" charset="2"/>
+              <a:buChar char=""/>
+            </a:pPr>
+            <a:r>
+              <a:rPr lang="en-CA" sz="2000" b="0" u="none" strike="noStrike">
+                <a:solidFill>
+                  <a:srgbClr val="000000"/>
+                </a:solidFill>
+                <a:effectLst/>
+                <a:uFillTx/>
+                <a:latin typeface="Arial"/>
+              </a:rPr>
+              <a:t>Sixth Outline Level</a:t>
+            </a:r>
+            <a:endParaRPr lang="en-CA" sz="2000" b="0" u="none" strike="noStrike">
+              <a:solidFill>
+                <a:srgbClr val="000000"/>
+              </a:solidFill>
+              <a:effectLst/>
+              <a:uFillTx/>
+              <a:latin typeface="Arial"/>
+            </a:endParaRPr>
+          </a:p>
+          <a:p>
+            <a:pPr marL="3024000" lvl="6" indent="-216000">
+              <a:lnSpc>
+                <a:spcPct val="100000"/>
+              </a:lnSpc>
+              <a:spcBef>
+                <a:spcPts val="283"/>
+              </a:spcBef>
+              <a:buClr>
+                <a:srgbClr val="000000"/>
+              </a:buClr>
+              <a:buSzPct val="45000"/>
+              <a:buFont typeface="Wingdings" charset="2"/>
+              <a:buChar char=""/>
+            </a:pPr>
+            <a:r>
+              <a:rPr lang="en-CA" sz="2000" b="0" u="none" strike="noStrike">
+                <a:solidFill>
+                  <a:srgbClr val="000000"/>
+                </a:solidFill>
+                <a:effectLst/>
+                <a:uFillTx/>
+                <a:latin typeface="Arial"/>
+              </a:rPr>
+              <a:t>Seventh Outline Level</a:t>
+            </a:r>
+            <a:endParaRPr lang="en-CA" sz="2000" b="0" u="none" strike="noStrike">
+              <a:solidFill>
+                <a:srgbClr val="000000"/>
+              </a:solidFill>
+              <a:effectLst/>
+              <a:uFillTx/>
+              <a:latin typeface="Arial"/>
+            </a:endParaRPr>
+          </a:p>
+        </p:txBody>
+      </p:sp>
+    </p:spTree>
+  </p:cSld>
+  <p:clrMap bg1="lt1" tx1="dk1" bg2="lt2" tx2="dk2" accent1="accent1" accent2="accent2" accent3="accent3" accent4="accent4" accent5="accent5" accent6="accent6" hlink="hlink" folHlink="folHlink"/>
+  <p:sldLayoutIdLst>
+    <p:sldLayoutId id="2147483651" r:id="rId2"/>
   </p:sldLayoutIdLst>
 </p:sldMaster>
 </file>
@@ -1245,14 +1564,14 @@
       </p:grpSpPr>
       <p:sp>
         <p:nvSpPr>
-          <p:cNvPr id="12" name=""/>
+          <p:cNvPr id="16" name=""/>
           <p:cNvSpPr/>
           <p:nvPr/>
         </p:nvSpPr>
         <p:spPr>
           <a:xfrm>
             <a:off x="244800" y="757080"/>
-            <a:ext cx="996120" cy="396000"/>
+            <a:ext cx="995760" cy="396000"/>
           </a:xfrm>
           <a:prstGeom prst="rect">
             <a:avLst/>
@@ -1318,14 +1637,14 @@
       </p:sp>
       <p:sp>
         <p:nvSpPr>
-          <p:cNvPr id="13" name=""/>
+          <p:cNvPr id="17" name=""/>
           <p:cNvSpPr/>
           <p:nvPr/>
         </p:nvSpPr>
         <p:spPr>
           <a:xfrm>
             <a:off x="2037600" y="2250720"/>
-            <a:ext cx="996120" cy="396000"/>
+            <a:ext cx="995760" cy="396000"/>
           </a:xfrm>
           <a:prstGeom prst="rect">
             <a:avLst/>
@@ -1391,14 +1710,14 @@
       </p:sp>
       <p:sp>
         <p:nvSpPr>
-          <p:cNvPr id="14" name=""/>
+          <p:cNvPr id="18" name=""/>
           <p:cNvSpPr/>
           <p:nvPr/>
         </p:nvSpPr>
         <p:spPr>
           <a:xfrm>
             <a:off x="254160" y="3718800"/>
-            <a:ext cx="996120" cy="396000"/>
+            <a:ext cx="995760" cy="396000"/>
           </a:xfrm>
           <a:prstGeom prst="rect">
             <a:avLst/>
@@ -1464,14 +1783,14 @@
       </p:sp>
       <p:sp>
         <p:nvSpPr>
-          <p:cNvPr id="15" name=""/>
+          <p:cNvPr id="19" name=""/>
           <p:cNvSpPr/>
           <p:nvPr/>
         </p:nvSpPr>
         <p:spPr>
           <a:xfrm>
             <a:off x="1995120" y="5122080"/>
-            <a:ext cx="996120" cy="396000"/>
+            <a:ext cx="995760" cy="396000"/>
           </a:xfrm>
           <a:prstGeom prst="rect">
             <a:avLst/>
@@ -1537,14 +1856,14 @@
       </p:sp>
       <p:sp>
         <p:nvSpPr>
-          <p:cNvPr id="16" name=""/>
+          <p:cNvPr id="20" name=""/>
           <p:cNvSpPr/>
           <p:nvPr/>
         </p:nvSpPr>
         <p:spPr>
           <a:xfrm>
             <a:off x="280440" y="6542280"/>
-            <a:ext cx="996120" cy="396000"/>
+            <a:ext cx="995760" cy="396000"/>
           </a:xfrm>
           <a:prstGeom prst="rect">
             <a:avLst/>
@@ -1610,14 +1929,14 @@
       </p:sp>
       <p:sp>
         <p:nvSpPr>
-          <p:cNvPr id="17" name="{{IMG_1}}"/>
+          <p:cNvPr id="21" name="{{IMG_1}}"/>
           <p:cNvSpPr/>
           <p:nvPr/>
         </p:nvSpPr>
         <p:spPr>
           <a:xfrm>
             <a:off x="1255320" y="270000"/>
-            <a:ext cx="1765080" cy="1357560"/>
+            <a:ext cx="1764720" cy="1357200"/>
           </a:xfrm>
           <a:prstGeom prst="rect">
             <a:avLst/>
@@ -1640,11 +1959,6 @@
             <a:noAutofit/>
           </a:bodyPr>
           <a:p>
-            <a:pPr>
-              <a:lnSpc>
-                <a:spcPct val="100000"/>
-              </a:lnSpc>
-            </a:pPr>
             <a:endParaRPr lang="en-CA" sz="1800" b="0" u="none" strike="noStrike">
               <a:solidFill>
                 <a:srgbClr val="000000"/>
@@ -1659,14 +1973,14 @@
       </p:sp>
       <p:sp>
         <p:nvSpPr>
-          <p:cNvPr id="18" name="{{IMG_2}}"/>
+          <p:cNvPr id="22" name="{{IMG_2}}"/>
           <p:cNvSpPr/>
           <p:nvPr/>
         </p:nvSpPr>
         <p:spPr>
           <a:xfrm>
             <a:off x="240480" y="1755720"/>
-            <a:ext cx="1801080" cy="1410480"/>
+            <a:ext cx="1800720" cy="1410120"/>
           </a:xfrm>
           <a:prstGeom prst="rect">
             <a:avLst/>
@@ -1689,11 +2003,6 @@
             <a:noAutofit/>
           </a:bodyPr>
           <a:p>
-            <a:pPr>
-              <a:lnSpc>
-                <a:spcPct val="100000"/>
-              </a:lnSpc>
-            </a:pPr>
             <a:endParaRPr lang="en-CA" sz="1800" b="0" u="none" strike="noStrike">
               <a:solidFill>
                 <a:srgbClr val="000000"/>
@@ -1708,14 +2017,14 @@
       </p:sp>
       <p:sp>
         <p:nvSpPr>
-          <p:cNvPr id="19" name="{{IMG_4}}"/>
+          <p:cNvPr id="23" name="{{IMG_4}}"/>
           <p:cNvSpPr/>
           <p:nvPr/>
         </p:nvSpPr>
         <p:spPr>
           <a:xfrm>
             <a:off x="239760" y="4661640"/>
-            <a:ext cx="1703160" cy="1333800"/>
+            <a:ext cx="1702800" cy="1333440"/>
           </a:xfrm>
           <a:prstGeom prst="rect">
             <a:avLst/>
@@ -1738,11 +2047,6 @@
             <a:noAutofit/>
           </a:bodyPr>
           <a:p>
-            <a:pPr>
-              <a:lnSpc>
-                <a:spcPct val="100000"/>
-              </a:lnSpc>
-            </a:pPr>
             <a:endParaRPr lang="en-CA" sz="1800" b="0" u="none" strike="noStrike">
               <a:solidFill>
                 <a:srgbClr val="000000"/>
@@ -1757,14 +2061,14 @@
       </p:sp>
       <p:sp>
         <p:nvSpPr>
-          <p:cNvPr id="20" name="{{IMG_3}}"/>
+          <p:cNvPr id="24" name="{{IMG_3}}"/>
           <p:cNvSpPr/>
           <p:nvPr/>
         </p:nvSpPr>
         <p:spPr>
           <a:xfrm>
             <a:off x="1319760" y="3267720"/>
-            <a:ext cx="1699560" cy="1303560"/>
+            <a:ext cx="1699200" cy="1303200"/>
           </a:xfrm>
           <a:prstGeom prst="rect">
             <a:avLst/>
@@ -1787,11 +2091,6 @@
             <a:noAutofit/>
           </a:bodyPr>
           <a:p>
-            <a:pPr>
-              <a:lnSpc>
-                <a:spcPct val="100000"/>
-              </a:lnSpc>
-            </a:pPr>
             <a:endParaRPr lang="en-CA" sz="1800" b="0" u="none" strike="noStrike">
               <a:solidFill>
                 <a:srgbClr val="000000"/>
@@ -1806,14 +2105,14 @@
       </p:sp>
       <p:sp>
         <p:nvSpPr>
-          <p:cNvPr id="21" name="{{IMG_5}}"/>
+          <p:cNvPr id="25" name="{{IMG_5}}"/>
           <p:cNvSpPr/>
           <p:nvPr/>
         </p:nvSpPr>
         <p:spPr>
           <a:xfrm>
             <a:off x="1380960" y="6063840"/>
-            <a:ext cx="1639800" cy="1285200"/>
+            <a:ext cx="1639440" cy="1284840"/>
           </a:xfrm>
           <a:prstGeom prst="rect">
             <a:avLst/>
@@ -1836,11 +2135,6 @@
             <a:noAutofit/>
           </a:bodyPr>
           <a:p>
-            <a:pPr>
-              <a:lnSpc>
-                <a:spcPct val="100000"/>
-              </a:lnSpc>
-            </a:pPr>
             <a:endParaRPr lang="en-CA" sz="1800" b="0" u="none" strike="noStrike">
               <a:solidFill>
                 <a:srgbClr val="000000"/>
@@ -1855,14 +2149,14 @@
       </p:sp>
       <p:sp>
         <p:nvSpPr>
-          <p:cNvPr id="22" name=""/>
+          <p:cNvPr id="26" name=""/>
           <p:cNvSpPr/>
           <p:nvPr/>
         </p:nvSpPr>
         <p:spPr>
           <a:xfrm>
             <a:off x="3778200" y="341280"/>
-            <a:ext cx="2586960" cy="443880"/>
+            <a:ext cx="2586600" cy="395280"/>
           </a:xfrm>
           <a:prstGeom prst="rect">
             <a:avLst/>
@@ -1913,14 +2207,14 @@
       </p:sp>
       <p:sp>
         <p:nvSpPr>
-          <p:cNvPr id="23" name=""/>
+          <p:cNvPr id="27" name=""/>
           <p:cNvSpPr/>
           <p:nvPr/>
         </p:nvSpPr>
         <p:spPr>
           <a:xfrm>
             <a:off x="3651120" y="785880"/>
-            <a:ext cx="2824920" cy="5513400"/>
+            <a:ext cx="2824560" cy="5513040"/>
           </a:xfrm>
           <a:prstGeom prst="rect">
             <a:avLst/>
@@ -1977,14 +2271,14 @@
       </p:sp>
       <p:sp>
         <p:nvSpPr>
-          <p:cNvPr id="24" name=""/>
+          <p:cNvPr id="28" name=""/>
           <p:cNvSpPr/>
           <p:nvPr/>
         </p:nvSpPr>
         <p:spPr>
           <a:xfrm>
             <a:off x="7111800" y="1428840"/>
-            <a:ext cx="2586960" cy="443880"/>
+            <a:ext cx="2586600" cy="395280"/>
           </a:xfrm>
           <a:prstGeom prst="rect">
             <a:avLst/>
@@ -2035,14 +2329,14 @@
       </p:sp>
       <p:sp>
         <p:nvSpPr>
-          <p:cNvPr id="25" name="{{IMG_MAIN}}"/>
+          <p:cNvPr id="29" name="{{IMG_MAIN}}"/>
           <p:cNvSpPr/>
           <p:nvPr/>
         </p:nvSpPr>
         <p:spPr>
           <a:xfrm>
             <a:off x="7064640" y="2086920"/>
-            <a:ext cx="2665080" cy="1936440"/>
+            <a:ext cx="2664720" cy="1936080"/>
           </a:xfrm>
           <a:prstGeom prst="rect">
             <a:avLst/>
@@ -2067,11 +2361,6 @@
             <a:noAutofit/>
           </a:bodyPr>
           <a:p>
-            <a:pPr>
-              <a:lnSpc>
-                <a:spcPct val="100000"/>
-              </a:lnSpc>
-            </a:pPr>
             <a:endParaRPr lang="en-CA" sz="1800" b="0" u="none" strike="noStrike">
               <a:solidFill>
                 <a:srgbClr val="000000"/>
@@ -2086,14 +2375,14 @@
       </p:sp>
       <p:sp>
         <p:nvSpPr>
-          <p:cNvPr id="26" name=""/>
+          <p:cNvPr id="30" name=""/>
           <p:cNvSpPr/>
           <p:nvPr/>
         </p:nvSpPr>
         <p:spPr>
           <a:xfrm>
             <a:off x="7139160" y="4844520"/>
-            <a:ext cx="2586960" cy="443880"/>
+            <a:ext cx="2586600" cy="334080"/>
           </a:xfrm>
           <a:prstGeom prst="rect">
             <a:avLst/>
@@ -2144,14 +2433,14 @@
       </p:sp>
       <p:sp>
         <p:nvSpPr>
-          <p:cNvPr id="27" name=""/>
+          <p:cNvPr id="31" name=""/>
           <p:cNvSpPr/>
           <p:nvPr/>
         </p:nvSpPr>
         <p:spPr>
           <a:xfrm>
             <a:off x="7132320" y="6575400"/>
-            <a:ext cx="2586960" cy="443880"/>
+            <a:ext cx="2586600" cy="395280"/>
           </a:xfrm>
           <a:prstGeom prst="rect">
             <a:avLst/>
@@ -2202,14 +2491,14 @@
       </p:sp>
       <p:sp>
         <p:nvSpPr>
-          <p:cNvPr id="28" name=""/>
+          <p:cNvPr id="32" name=""/>
           <p:cNvSpPr/>
           <p:nvPr/>
         </p:nvSpPr>
         <p:spPr>
           <a:xfrm>
             <a:off x="7132320" y="6130800"/>
-            <a:ext cx="2586960" cy="443880"/>
+            <a:ext cx="2586600" cy="334080"/>
           </a:xfrm>
           <a:prstGeom prst="rect">
             <a:avLst/>
@@ -2298,23 +2587,25 @@
       </p:grpSpPr>
       <p:sp>
         <p:nvSpPr>
-          <p:cNvPr id="29" name="{{IMG_6}} "/>
+          <p:cNvPr id="33" name=""/>
           <p:cNvSpPr/>
           <p:nvPr/>
         </p:nvSpPr>
         <p:spPr>
           <a:xfrm>
-            <a:off x="1322640" y="241560"/>
-            <a:ext cx="1697400" cy="1311120"/>
+            <a:off x="7368840" y="7129080"/>
+            <a:ext cx="2232360" cy="187200"/>
           </a:xfrm>
           <a:prstGeom prst="rect">
             <a:avLst/>
           </a:prstGeom>
           <a:solidFill>
-            <a:srgbClr val="729fcf"/>
+            <a:srgbClr val="ffffff"/>
           </a:solidFill>
           <a:ln w="0">
-            <a:noFill/>
+            <a:solidFill>
+              <a:srgbClr val="ffffff"/>
+            </a:solidFill>
           </a:ln>
         </p:spPr>
         <p:style>
@@ -2328,11 +2619,6 @@
             <a:noAutofit/>
           </a:bodyPr>
           <a:p>
-            <a:pPr>
-              <a:lnSpc>
-                <a:spcPct val="100000"/>
-              </a:lnSpc>
-            </a:pPr>
             <a:endParaRPr lang="en-CA" sz="1800" b="0" u="none" strike="noStrike">
               <a:solidFill>
                 <a:srgbClr val="000000"/>
@@ -2340,21 +2626,20 @@
               <a:effectLst/>
               <a:uFillTx/>
               <a:latin typeface="Arial"/>
-              <a:ea typeface="DejaVu Sans"/>
-            </a:endParaRPr>
-          </a:p>
-        </p:txBody>
-      </p:sp>
-      <p:sp>
-        <p:nvSpPr>
-          <p:cNvPr id="30" name="{{IMG_7}}"/>
+            </a:endParaRPr>
+          </a:p>
+        </p:txBody>
+      </p:sp>
+      <p:sp>
+        <p:nvSpPr>
+          <p:cNvPr id="34" name="{{IMG_6}} "/>
           <p:cNvSpPr/>
           <p:nvPr/>
         </p:nvSpPr>
         <p:spPr>
           <a:xfrm>
-            <a:off x="329760" y="1672920"/>
-            <a:ext cx="1645200" cy="1322640"/>
+            <a:off x="1322640" y="241560"/>
+            <a:ext cx="1697040" cy="1310760"/>
           </a:xfrm>
           <a:prstGeom prst="rect">
             <a:avLst/>
@@ -2377,11 +2662,6 @@
             <a:noAutofit/>
           </a:bodyPr>
           <a:p>
-            <a:pPr>
-              <a:lnSpc>
-                <a:spcPct val="100000"/>
-              </a:lnSpc>
-            </a:pPr>
             <a:endParaRPr lang="en-CA" sz="1800" b="0" u="none" strike="noStrike">
               <a:solidFill>
                 <a:srgbClr val="000000"/>
@@ -2396,14 +2676,14 @@
       </p:sp>
       <p:sp>
         <p:nvSpPr>
-          <p:cNvPr id="31" name="{{IMG_8}}"/>
+          <p:cNvPr id="35" name="{{IMG_7}}"/>
           <p:cNvSpPr/>
           <p:nvPr/>
         </p:nvSpPr>
         <p:spPr>
           <a:xfrm>
-            <a:off x="1323360" y="3106080"/>
-            <a:ext cx="1696680" cy="1374120"/>
+            <a:off x="329760" y="1672920"/>
+            <a:ext cx="1644840" cy="1322280"/>
           </a:xfrm>
           <a:prstGeom prst="rect">
             <a:avLst/>
@@ -2426,11 +2706,6 @@
             <a:noAutofit/>
           </a:bodyPr>
           <a:p>
-            <a:pPr>
-              <a:lnSpc>
-                <a:spcPct val="100000"/>
-              </a:lnSpc>
-            </a:pPr>
             <a:endParaRPr lang="en-CA" sz="1800" b="0" u="none" strike="noStrike">
               <a:solidFill>
                 <a:srgbClr val="000000"/>
@@ -2445,14 +2720,14 @@
       </p:sp>
       <p:sp>
         <p:nvSpPr>
-          <p:cNvPr id="32" name="{{IMG_9}}"/>
+          <p:cNvPr id="36" name="{{IMG_8}}"/>
           <p:cNvSpPr/>
           <p:nvPr/>
         </p:nvSpPr>
         <p:spPr>
           <a:xfrm>
-            <a:off x="289800" y="4596840"/>
-            <a:ext cx="1588680" cy="1460520"/>
+            <a:off x="1323360" y="3106080"/>
+            <a:ext cx="1696320" cy="1373760"/>
           </a:xfrm>
           <a:prstGeom prst="rect">
             <a:avLst/>
@@ -2475,11 +2750,6 @@
             <a:noAutofit/>
           </a:bodyPr>
           <a:p>
-            <a:pPr>
-              <a:lnSpc>
-                <a:spcPct val="100000"/>
-              </a:lnSpc>
-            </a:pPr>
             <a:endParaRPr lang="en-CA" sz="1800" b="0" u="none" strike="noStrike">
               <a:solidFill>
                 <a:srgbClr val="000000"/>
@@ -2494,14 +2764,14 @@
       </p:sp>
       <p:sp>
         <p:nvSpPr>
-          <p:cNvPr id="33" name="{{IMG_10}}"/>
+          <p:cNvPr id="37" name="{{IMG_9}}"/>
           <p:cNvSpPr/>
           <p:nvPr/>
         </p:nvSpPr>
         <p:spPr>
           <a:xfrm>
-            <a:off x="1332000" y="6153840"/>
-            <a:ext cx="1695600" cy="1309680"/>
+            <a:off x="289800" y="4596840"/>
+            <a:ext cx="1588320" cy="1460160"/>
           </a:xfrm>
           <a:prstGeom prst="rect">
             <a:avLst/>
@@ -2524,11 +2794,6 @@
             <a:noAutofit/>
           </a:bodyPr>
           <a:p>
-            <a:pPr>
-              <a:lnSpc>
-                <a:spcPct val="100000"/>
-              </a:lnSpc>
-            </a:pPr>
             <a:endParaRPr lang="en-CA" sz="1800" b="0" u="none" strike="noStrike">
               <a:solidFill>
                 <a:srgbClr val="000000"/>
@@ -2543,19 +2808,21 @@
       </p:sp>
       <p:sp>
         <p:nvSpPr>
-          <p:cNvPr id="34" name=""/>
+          <p:cNvPr id="38" name="{{IMG_10}}"/>
           <p:cNvSpPr/>
           <p:nvPr/>
         </p:nvSpPr>
         <p:spPr>
           <a:xfrm>
-            <a:off x="315720" y="699120"/>
-            <a:ext cx="996120" cy="396000"/>
-          </a:xfrm>
-          <a:prstGeom prst="rect">
-            <a:avLst/>
-          </a:prstGeom>
-          <a:noFill/>
+            <a:off x="1332000" y="6153840"/>
+            <a:ext cx="1695240" cy="1309320"/>
+          </a:xfrm>
+          <a:prstGeom prst="rect">
+            <a:avLst/>
+          </a:prstGeom>
+          <a:solidFill>
+            <a:srgbClr val="729fcf"/>
+          </a:solidFill>
           <a:ln w="0">
             <a:noFill/>
           </a:ln>
@@ -2567,63 +2834,32 @@
           <a:fontRef idx="minor"/>
         </p:style>
         <p:txBody>
-          <a:bodyPr lIns="90000" rIns="90000" tIns="45000" bIns="45000" anchor="ctr" anchorCtr="1">
-            <a:spAutoFit/>
-          </a:bodyPr>
-          <a:p>
-            <a:pPr algn="ctr">
-              <a:lnSpc>
-                <a:spcPct val="100000"/>
-              </a:lnSpc>
-            </a:pPr>
-            <a:r>
-              <a:rPr lang="en-CA" sz="1000" b="0" i="1" u="none" strike="noStrike">
-                <a:solidFill>
-                  <a:srgbClr val="000000"/>
-                </a:solidFill>
-                <a:effectLst/>
-                <a:uFillTx/>
-                <a:latin typeface="Nimbus Roman"/>
-                <a:ea typeface="DejaVu Sans"/>
-              </a:rPr>
-              <a:t>{{caption_6}}</a:t>
-            </a:r>
-            <a:endParaRPr lang="en-CA" sz="1000" b="0" u="none" strike="noStrike">
-              <a:solidFill>
-                <a:srgbClr val="000000"/>
-              </a:solidFill>
-              <a:effectLst/>
-              <a:uFillTx/>
-              <a:latin typeface="Arial"/>
-            </a:endParaRPr>
-          </a:p>
-          <a:p>
-            <a:pPr algn="ctr">
-              <a:lnSpc>
-                <a:spcPct val="100000"/>
-              </a:lnSpc>
-            </a:pPr>
-            <a:endParaRPr lang="en-CA" sz="1000" b="0" u="none" strike="noStrike">
-              <a:solidFill>
-                <a:srgbClr val="000000"/>
-              </a:solidFill>
-              <a:effectLst/>
-              <a:uFillTx/>
-              <a:latin typeface="Arial"/>
-            </a:endParaRPr>
-          </a:p>
-        </p:txBody>
-      </p:sp>
-      <p:sp>
-        <p:nvSpPr>
-          <p:cNvPr id="35" name=""/>
+          <a:bodyPr lIns="90000" rIns="90000" tIns="45000" bIns="45000" anchor="ctr">
+            <a:noAutofit/>
+          </a:bodyPr>
+          <a:p>
+            <a:endParaRPr lang="en-CA" sz="1800" b="0" u="none" strike="noStrike">
+              <a:solidFill>
+                <a:srgbClr val="000000"/>
+              </a:solidFill>
+              <a:effectLst/>
+              <a:uFillTx/>
+              <a:latin typeface="Arial"/>
+              <a:ea typeface="DejaVu Sans"/>
+            </a:endParaRPr>
+          </a:p>
+        </p:txBody>
+      </p:sp>
+      <p:sp>
+        <p:nvSpPr>
+          <p:cNvPr id="39" name=""/>
           <p:cNvSpPr/>
           <p:nvPr/>
         </p:nvSpPr>
         <p:spPr>
           <a:xfrm>
-            <a:off x="1975680" y="2120400"/>
-            <a:ext cx="1045080" cy="396000"/>
+            <a:off x="315720" y="699120"/>
+            <a:ext cx="995760" cy="396000"/>
           </a:xfrm>
           <a:prstGeom prst="rect">
             <a:avLst/>
@@ -2659,7 +2895,7 @@
                 <a:latin typeface="Nimbus Roman"/>
                 <a:ea typeface="DejaVu Sans"/>
               </a:rPr>
-              <a:t>{{caption_7}}</a:t>
+              <a:t>{{caption_6}}</a:t>
             </a:r>
             <a:endParaRPr lang="en-CA" sz="1000" b="0" u="none" strike="noStrike">
               <a:solidFill>
@@ -2689,14 +2925,14 @@
       </p:sp>
       <p:sp>
         <p:nvSpPr>
-          <p:cNvPr id="36" name=""/>
+          <p:cNvPr id="40" name=""/>
           <p:cNvSpPr/>
           <p:nvPr/>
         </p:nvSpPr>
         <p:spPr>
           <a:xfrm>
-            <a:off x="289800" y="3593160"/>
-            <a:ext cx="1032840" cy="396000"/>
+            <a:off x="1975680" y="2120400"/>
+            <a:ext cx="1044720" cy="396000"/>
           </a:xfrm>
           <a:prstGeom prst="rect">
             <a:avLst/>
@@ -2732,7 +2968,7 @@
                 <a:latin typeface="Nimbus Roman"/>
                 <a:ea typeface="DejaVu Sans"/>
               </a:rPr>
-              <a:t>{{caption_8}}</a:t>
+              <a:t>{{caption_7}}</a:t>
             </a:r>
             <a:endParaRPr lang="en-CA" sz="1000" b="0" u="none" strike="noStrike">
               <a:solidFill>
@@ -2762,14 +2998,14 @@
       </p:sp>
       <p:sp>
         <p:nvSpPr>
-          <p:cNvPr id="37" name=""/>
+          <p:cNvPr id="41" name=""/>
           <p:cNvSpPr/>
           <p:nvPr/>
         </p:nvSpPr>
         <p:spPr>
           <a:xfrm>
-            <a:off x="308520" y="6614280"/>
-            <a:ext cx="1022760" cy="396000"/>
+            <a:off x="289800" y="3593160"/>
+            <a:ext cx="1032480" cy="396000"/>
           </a:xfrm>
           <a:prstGeom prst="rect">
             <a:avLst/>
@@ -2805,7 +3041,7 @@
                 <a:latin typeface="Nimbus Roman"/>
                 <a:ea typeface="DejaVu Sans"/>
               </a:rPr>
-              <a:t>{{caption_10}}</a:t>
+              <a:t>{{caption_8}}</a:t>
             </a:r>
             <a:endParaRPr lang="en-CA" sz="1000" b="0" u="none" strike="noStrike">
               <a:solidFill>
@@ -2835,14 +3071,14 @@
       </p:sp>
       <p:sp>
         <p:nvSpPr>
-          <p:cNvPr id="38" name=""/>
+          <p:cNvPr id="42" name=""/>
           <p:cNvSpPr/>
           <p:nvPr/>
         </p:nvSpPr>
         <p:spPr>
           <a:xfrm>
-            <a:off x="1879200" y="5130720"/>
-            <a:ext cx="1149120" cy="396000"/>
+            <a:off x="308520" y="6614280"/>
+            <a:ext cx="1022400" cy="396000"/>
           </a:xfrm>
           <a:prstGeom prst="rect">
             <a:avLst/>
@@ -2878,7 +3114,7 @@
                 <a:latin typeface="Nimbus Roman"/>
                 <a:ea typeface="DejaVu Sans"/>
               </a:rPr>
-              <a:t>{{caption_9}}</a:t>
+              <a:t>{{caption_10}}</a:t>
             </a:r>
             <a:endParaRPr lang="en-CA" sz="1000" b="0" u="none" strike="noStrike">
               <a:solidFill>
@@ -2908,14 +3144,14 @@
       </p:sp>
       <p:sp>
         <p:nvSpPr>
-          <p:cNvPr id="39" name=""/>
+          <p:cNvPr id="43" name=""/>
           <p:cNvSpPr/>
           <p:nvPr/>
         </p:nvSpPr>
         <p:spPr>
           <a:xfrm>
-            <a:off x="3778200" y="341640"/>
-            <a:ext cx="2586960" cy="443880"/>
+            <a:off x="1879200" y="5130720"/>
+            <a:ext cx="1148760" cy="396000"/>
           </a:xfrm>
           <a:prstGeom prst="rect">
             <a:avLst/>
@@ -2932,7 +3168,7 @@
           <a:fontRef idx="minor"/>
         </p:style>
         <p:txBody>
-          <a:bodyPr lIns="90000" rIns="90000" tIns="45000" bIns="45000" anchor="t" anchorCtr="1">
+          <a:bodyPr lIns="90000" rIns="90000" tIns="45000" bIns="45000" anchor="ctr" anchorCtr="1">
             <a:spAutoFit/>
           </a:bodyPr>
           <a:p>
@@ -2942,38 +3178,53 @@
               </a:lnSpc>
             </a:pPr>
             <a:r>
-              <a:rPr lang="en-CA" sz="2000" b="1" i="1" u="none" strike="noStrike">
+              <a:rPr lang="en-CA" sz="1000" b="0" i="1" u="none" strike="noStrike">
                 <a:solidFill>
                   <a:srgbClr val="000000"/>
                 </a:solidFill>
                 <a:effectLst/>
                 <a:uFillTx/>
                 <a:latin typeface="Nimbus Roman"/>
-                <a:ea typeface="Noto Sans CJK SC"/>
-              </a:rPr>
-              <a:t>{{ADDRESS}}</a:t>
-            </a:r>
-            <a:endParaRPr lang="en-CA" sz="2000" b="0" u="none" strike="noStrike">
-              <a:solidFill>
-                <a:srgbClr val="000000"/>
-              </a:solidFill>
-              <a:effectLst/>
-              <a:uFillTx/>
-              <a:latin typeface="Arial"/>
-            </a:endParaRPr>
-          </a:p>
-        </p:txBody>
-      </p:sp>
-      <p:sp>
-        <p:nvSpPr>
-          <p:cNvPr id="40" name=""/>
+                <a:ea typeface="DejaVu Sans"/>
+              </a:rPr>
+              <a:t>{{caption_9}}</a:t>
+            </a:r>
+            <a:endParaRPr lang="en-CA" sz="1000" b="0" u="none" strike="noStrike">
+              <a:solidFill>
+                <a:srgbClr val="000000"/>
+              </a:solidFill>
+              <a:effectLst/>
+              <a:uFillTx/>
+              <a:latin typeface="Arial"/>
+            </a:endParaRPr>
+          </a:p>
+          <a:p>
+            <a:pPr algn="ctr">
+              <a:lnSpc>
+                <a:spcPct val="100000"/>
+              </a:lnSpc>
+            </a:pPr>
+            <a:endParaRPr lang="en-CA" sz="1000" b="0" u="none" strike="noStrike">
+              <a:solidFill>
+                <a:srgbClr val="000000"/>
+              </a:solidFill>
+              <a:effectLst/>
+              <a:uFillTx/>
+              <a:latin typeface="Arial"/>
+            </a:endParaRPr>
+          </a:p>
+        </p:txBody>
+      </p:sp>
+      <p:sp>
+        <p:nvSpPr>
+          <p:cNvPr id="44" name=""/>
           <p:cNvSpPr/>
           <p:nvPr/>
         </p:nvSpPr>
         <p:spPr>
           <a:xfrm>
-            <a:off x="7132320" y="342000"/>
-            <a:ext cx="2586960" cy="443880"/>
+            <a:off x="3778200" y="341640"/>
+            <a:ext cx="2586600" cy="395280"/>
           </a:xfrm>
           <a:prstGeom prst="rect">
             <a:avLst/>
@@ -3024,14 +3275,14 @@
       </p:sp>
       <p:sp>
         <p:nvSpPr>
-          <p:cNvPr id="41" name=""/>
+          <p:cNvPr id="45" name=""/>
           <p:cNvSpPr/>
           <p:nvPr/>
         </p:nvSpPr>
         <p:spPr>
           <a:xfrm>
-            <a:off x="3600000" y="786240"/>
-            <a:ext cx="2930760" cy="6593040"/>
+            <a:off x="7132320" y="342000"/>
+            <a:ext cx="2586600" cy="395280"/>
           </a:xfrm>
           <a:prstGeom prst="rect">
             <a:avLst/>
@@ -3048,6 +3299,64 @@
           <a:fontRef idx="minor"/>
         </p:style>
         <p:txBody>
+          <a:bodyPr lIns="90000" rIns="90000" tIns="45000" bIns="45000" anchor="t" anchorCtr="1">
+            <a:spAutoFit/>
+          </a:bodyPr>
+          <a:p>
+            <a:pPr algn="ctr">
+              <a:lnSpc>
+                <a:spcPct val="100000"/>
+              </a:lnSpc>
+            </a:pPr>
+            <a:r>
+              <a:rPr lang="en-CA" sz="2000" b="1" i="1" u="none" strike="noStrike">
+                <a:solidFill>
+                  <a:srgbClr val="000000"/>
+                </a:solidFill>
+                <a:effectLst/>
+                <a:uFillTx/>
+                <a:latin typeface="Nimbus Roman"/>
+                <a:ea typeface="Noto Sans CJK SC"/>
+              </a:rPr>
+              <a:t>{{ADDRESS}}</a:t>
+            </a:r>
+            <a:endParaRPr lang="en-CA" sz="2000" b="0" u="none" strike="noStrike">
+              <a:solidFill>
+                <a:srgbClr val="000000"/>
+              </a:solidFill>
+              <a:effectLst/>
+              <a:uFillTx/>
+              <a:latin typeface="Arial"/>
+            </a:endParaRPr>
+          </a:p>
+        </p:txBody>
+      </p:sp>
+      <p:sp>
+        <p:nvSpPr>
+          <p:cNvPr id="46" name=""/>
+          <p:cNvSpPr/>
+          <p:nvPr/>
+        </p:nvSpPr>
+        <p:spPr>
+          <a:xfrm>
+            <a:off x="3600000" y="786240"/>
+            <a:ext cx="2930400" cy="517320"/>
+          </a:xfrm>
+          <a:prstGeom prst="rect">
+            <a:avLst/>
+          </a:prstGeom>
+          <a:noFill/>
+          <a:ln w="0">
+            <a:noFill/>
+          </a:ln>
+        </p:spPr>
+        <p:style>
+          <a:lnRef idx="0"/>
+          <a:fillRef idx="0"/>
+          <a:effectRef idx="0"/>
+          <a:fontRef idx="minor"/>
+        </p:style>
+        <p:txBody>
           <a:bodyPr lIns="90000" rIns="90000" tIns="45000" bIns="45000" anchor="t">
             <a:spAutoFit/>
           </a:bodyPr>
@@ -3088,14 +3397,14 @@
       </p:sp>
       <p:sp>
         <p:nvSpPr>
-          <p:cNvPr id="42" name=""/>
+          <p:cNvPr id="47" name=""/>
           <p:cNvSpPr/>
           <p:nvPr/>
         </p:nvSpPr>
         <p:spPr>
           <a:xfrm>
             <a:off x="6966720" y="768960"/>
-            <a:ext cx="2952000" cy="409680"/>
+            <a:ext cx="2951640" cy="410400"/>
           </a:xfrm>
           <a:prstGeom prst="rect">
             <a:avLst/>
@@ -3149,14 +3458,14 @@
       </p:sp>
       <p:sp>
         <p:nvSpPr>
-          <p:cNvPr id="43" name=""/>
+          <p:cNvPr id="48" name=""/>
           <p:cNvSpPr/>
           <p:nvPr/>
         </p:nvSpPr>
         <p:spPr>
           <a:xfrm>
             <a:off x="7091640" y="6444720"/>
-            <a:ext cx="2586960" cy="443880"/>
+            <a:ext cx="2586600" cy="334080"/>
           </a:xfrm>
           <a:prstGeom prst="rect">
             <a:avLst/>
@@ -3195,6 +3504,255 @@
               <a:t>{{TOTAL}}</a:t>
             </a:r>
             <a:endParaRPr lang="en-CA" sz="1600" b="0" u="none" strike="noStrike">
+              <a:solidFill>
+                <a:srgbClr val="000000"/>
+              </a:solidFill>
+              <a:effectLst/>
+              <a:uFillTx/>
+              <a:latin typeface="Arial"/>
+            </a:endParaRPr>
+          </a:p>
+        </p:txBody>
+      </p:sp>
+      <p:sp>
+        <p:nvSpPr>
+          <p:cNvPr id="49" name=""/>
+          <p:cNvSpPr/>
+          <p:nvPr/>
+        </p:nvSpPr>
+        <p:spPr>
+          <a:xfrm>
+            <a:off x="7334280" y="6003360"/>
+            <a:ext cx="2259000" cy="224640"/>
+          </a:xfrm>
+          <a:prstGeom prst="rect">
+            <a:avLst/>
+          </a:prstGeom>
+          <a:solidFill>
+            <a:srgbClr val="ffffff"/>
+          </a:solidFill>
+          <a:ln w="0">
+            <a:solidFill>
+              <a:srgbClr val="ffffff"/>
+            </a:solidFill>
+          </a:ln>
+        </p:spPr>
+        <p:style>
+          <a:lnRef idx="0"/>
+          <a:fillRef idx="0"/>
+          <a:effectRef idx="0"/>
+          <a:fontRef idx="minor"/>
+        </p:style>
+        <p:txBody>
+          <a:bodyPr lIns="90000" rIns="90000" tIns="45000" bIns="45000" anchor="ctr">
+            <a:noAutofit/>
+          </a:bodyPr>
+          <a:p>
+            <a:endParaRPr lang="en-CA" sz="1800" b="0" u="none" strike="noStrike">
+              <a:solidFill>
+                <a:srgbClr val="000000"/>
+              </a:solidFill>
+              <a:effectLst/>
+              <a:uFillTx/>
+              <a:latin typeface="Arial"/>
+            </a:endParaRPr>
+          </a:p>
+        </p:txBody>
+      </p:sp>
+      <p:pic>
+        <p:nvPicPr>
+          <p:cNvPr id="50" name=""/>
+          <p:cNvPicPr/>
+          <p:nvPr/>
+        </p:nvPicPr>
+        <p:blipFill>
+          <a:blip r:embed="rId2"/>
+          <a:stretch/>
+        </p:blipFill>
+        <p:spPr>
+          <a:xfrm>
+            <a:off x="7728120" y="7104960"/>
+            <a:ext cx="1422720" cy="123480"/>
+          </a:xfrm>
+          <a:prstGeom prst="rect">
+            <a:avLst/>
+          </a:prstGeom>
+          <a:noFill/>
+          <a:ln w="0">
+            <a:noFill/>
+          </a:ln>
+        </p:spPr>
+      </p:pic>
+      <p:sp>
+        <p:nvSpPr>
+          <p:cNvPr id="51" name=""/>
+          <p:cNvSpPr/>
+          <p:nvPr/>
+        </p:nvSpPr>
+        <p:spPr>
+          <a:xfrm>
+            <a:off x="7728120" y="7096680"/>
+            <a:ext cx="3960" cy="129240"/>
+          </a:xfrm>
+          <a:prstGeom prst="rect">
+            <a:avLst/>
+          </a:prstGeom>
+          <a:solidFill>
+            <a:srgbClr val="ffffff"/>
+          </a:solidFill>
+          <a:ln w="0">
+            <a:solidFill>
+              <a:srgbClr val="ffffff"/>
+            </a:solidFill>
+          </a:ln>
+        </p:spPr>
+        <p:style>
+          <a:lnRef idx="0"/>
+          <a:fillRef idx="0"/>
+          <a:effectRef idx="0"/>
+          <a:fontRef idx="minor"/>
+        </p:style>
+        <p:txBody>
+          <a:bodyPr lIns="90000" rIns="90000" tIns="45000" bIns="45000" anchor="ctr">
+            <a:noAutofit/>
+          </a:bodyPr>
+          <a:p>
+            <a:endParaRPr lang="en-CA" sz="1800" b="0" u="none" strike="noStrike">
+              <a:solidFill>
+                <a:srgbClr val="000000"/>
+              </a:solidFill>
+              <a:effectLst/>
+              <a:uFillTx/>
+              <a:latin typeface="Arial"/>
+            </a:endParaRPr>
+          </a:p>
+        </p:txBody>
+      </p:sp>
+      <p:sp>
+        <p:nvSpPr>
+          <p:cNvPr id="52" name=""/>
+          <p:cNvSpPr/>
+          <p:nvPr/>
+        </p:nvSpPr>
+        <p:spPr>
+          <a:xfrm>
+            <a:off x="9146880" y="7098120"/>
+            <a:ext cx="9000" cy="128520"/>
+          </a:xfrm>
+          <a:prstGeom prst="rect">
+            <a:avLst/>
+          </a:prstGeom>
+          <a:solidFill>
+            <a:srgbClr val="ffffff"/>
+          </a:solidFill>
+          <a:ln w="0">
+            <a:solidFill>
+              <a:srgbClr val="ffffff"/>
+            </a:solidFill>
+          </a:ln>
+        </p:spPr>
+        <p:style>
+          <a:lnRef idx="0"/>
+          <a:fillRef idx="0"/>
+          <a:effectRef idx="0"/>
+          <a:fontRef idx="minor"/>
+        </p:style>
+        <p:txBody>
+          <a:bodyPr lIns="90000" rIns="90000" tIns="45000" bIns="45000" anchor="ctr">
+            <a:noAutofit/>
+          </a:bodyPr>
+          <a:p>
+            <a:endParaRPr lang="en-CA" sz="1800" b="0" u="none" strike="noStrike">
+              <a:solidFill>
+                <a:srgbClr val="000000"/>
+              </a:solidFill>
+              <a:effectLst/>
+              <a:uFillTx/>
+              <a:latin typeface="Arial"/>
+            </a:endParaRPr>
+          </a:p>
+        </p:txBody>
+      </p:sp>
+      <p:sp>
+        <p:nvSpPr>
+          <p:cNvPr id="53" name=""/>
+          <p:cNvSpPr/>
+          <p:nvPr/>
+        </p:nvSpPr>
+        <p:spPr>
+          <a:xfrm>
+            <a:off x="7724880" y="7224120"/>
+            <a:ext cx="1436760" cy="9720"/>
+          </a:xfrm>
+          <a:prstGeom prst="rect">
+            <a:avLst/>
+          </a:prstGeom>
+          <a:solidFill>
+            <a:srgbClr val="ffffff"/>
+          </a:solidFill>
+          <a:ln w="0">
+            <a:solidFill>
+              <a:srgbClr val="ffffff"/>
+            </a:solidFill>
+          </a:ln>
+        </p:spPr>
+        <p:style>
+          <a:lnRef idx="0"/>
+          <a:fillRef idx="0"/>
+          <a:effectRef idx="0"/>
+          <a:fontRef idx="minor"/>
+        </p:style>
+        <p:txBody>
+          <a:bodyPr lIns="90000" rIns="90000" tIns="-35280" bIns="-35280" anchor="ctr">
+            <a:noAutofit/>
+          </a:bodyPr>
+          <a:p>
+            <a:endParaRPr lang="en-CA" sz="1800" b="0" u="none" strike="noStrike">
+              <a:solidFill>
+                <a:srgbClr val="000000"/>
+              </a:solidFill>
+              <a:effectLst/>
+              <a:uFillTx/>
+              <a:latin typeface="Arial"/>
+            </a:endParaRPr>
+          </a:p>
+        </p:txBody>
+      </p:sp>
+      <p:sp>
+        <p:nvSpPr>
+          <p:cNvPr id="54" name=""/>
+          <p:cNvSpPr/>
+          <p:nvPr/>
+        </p:nvSpPr>
+        <p:spPr>
+          <a:xfrm>
+            <a:off x="7732080" y="7096680"/>
+            <a:ext cx="1424520" cy="14760"/>
+          </a:xfrm>
+          <a:prstGeom prst="rect">
+            <a:avLst/>
+          </a:prstGeom>
+          <a:solidFill>
+            <a:srgbClr val="ffffff"/>
+          </a:solidFill>
+          <a:ln w="0">
+            <a:solidFill>
+              <a:srgbClr val="ffffff"/>
+            </a:solidFill>
+          </a:ln>
+        </p:spPr>
+        <p:style>
+          <a:lnRef idx="0"/>
+          <a:fillRef idx="0"/>
+          <a:effectRef idx="0"/>
+          <a:fontRef idx="minor"/>
+        </p:style>
+        <p:txBody>
+          <a:bodyPr lIns="90000" rIns="90000" tIns="-30240" bIns="-30240" anchor="ctr">
+            <a:noAutofit/>
+          </a:bodyPr>
+          <a:p>
+            <a:endParaRPr lang="en-CA" sz="1800" b="0" u="none" strike="noStrike">
               <a:solidFill>
                 <a:srgbClr val="000000"/>
               </a:solidFill>
@@ -3322,4 +3880,110 @@
     </a:fmtScheme>
   </a:themeElements>
 </a:theme>
+</file>
+
+<file path=ppt/theme/theme2.xml><?xml version="1.0" encoding="utf-8"?>
+<a:theme xmlns:a="http://schemas.openxmlformats.org/drawingml/2006/main" xmlns:r="http://schemas.openxmlformats.org/officeDocument/2006/relationships" name="Office">
+  <a:themeElements>
+    <a:clrScheme name="LibreOffice">
+      <a:dk1>
+        <a:srgbClr val="000000"/>
+      </a:dk1>
+      <a:lt1>
+        <a:srgbClr val="ffffff"/>
+      </a:lt1>
+      <a:dk2>
+        <a:srgbClr val="000000"/>
+      </a:dk2>
+      <a:lt2>
+        <a:srgbClr val="ffffff"/>
+      </a:lt2>
+      <a:accent1>
+        <a:srgbClr val="18a303"/>
+      </a:accent1>
+      <a:accent2>
+        <a:srgbClr val="0369a3"/>
+      </a:accent2>
+      <a:accent3>
+        <a:srgbClr val="a33e03"/>
+      </a:accent3>
+      <a:accent4>
+        <a:srgbClr val="8e03a3"/>
+      </a:accent4>
+      <a:accent5>
+        <a:srgbClr val="c99c00"/>
+      </a:accent5>
+      <a:accent6>
+        <a:srgbClr val="c9211e"/>
+      </a:accent6>
+      <a:hlink>
+        <a:srgbClr val="0000ee"/>
+      </a:hlink>
+      <a:folHlink>
+        <a:srgbClr val="551a8b"/>
+      </a:folHlink>
+    </a:clrScheme>
+    <a:fontScheme name="Office">
+      <a:majorFont>
+        <a:latin typeface="Arial" pitchFamily="0" charset="1"/>
+        <a:ea typeface="DejaVu Sans" pitchFamily="0" charset="1"/>
+        <a:cs typeface="DejaVu Sans" pitchFamily="0" charset="1"/>
+      </a:majorFont>
+      <a:minorFont>
+        <a:latin typeface="Arial" pitchFamily="0" charset="1"/>
+        <a:ea typeface="DejaVu Sans" pitchFamily="0" charset="1"/>
+        <a:cs typeface="DejaVu Sans" pitchFamily="0" charset="1"/>
+      </a:minorFont>
+    </a:fontScheme>
+    <a:fmtScheme>
+      <a:fillStyleLst>
+        <a:solidFill>
+          <a:schemeClr val="phClr"/>
+        </a:solidFill>
+        <a:solidFill>
+          <a:schemeClr val="phClr"/>
+        </a:solidFill>
+        <a:solidFill>
+          <a:schemeClr val="phClr"/>
+        </a:solidFill>
+      </a:fillStyleLst>
+      <a:lnStyleLst>
+        <a:ln w="6350" cap="flat" cmpd="sng" algn="ctr">
+          <a:prstDash val="solid"/>
+          <a:miter/>
+        </a:ln>
+        <a:ln w="6350" cap="flat" cmpd="sng" algn="ctr">
+          <a:prstDash val="solid"/>
+          <a:miter/>
+        </a:ln>
+        <a:ln w="6350" cap="flat" cmpd="sng" algn="ctr">
+          <a:prstDash val="solid"/>
+          <a:miter/>
+        </a:ln>
+      </a:lnStyleLst>
+      <a:effectStyleLst>
+        <a:effectStyle>
+          <a:effectLst/>
+        </a:effectStyle>
+        <a:effectStyle>
+          <a:effectLst/>
+        </a:effectStyle>
+        <a:effectStyle>
+          <a:effectLst/>
+        </a:effectStyle>
+      </a:effectStyleLst>
+      <a:bgFillStyleLst>
+        <a:solidFill>
+          <a:schemeClr val="phClr"/>
+        </a:solidFill>
+        <a:solidFill>
+          <a:schemeClr val="phClr"/>
+        </a:solidFill>
+        <a:solidFill>
+          <a:schemeClr val="phClr"/>
+        </a:solidFill>
+      </a:bgFillStyleLst>
+    </a:fmtScheme>
+  </a:themeElements>
+</a:theme>
 </file>